--- a/en/slides/15-Computer_Architecture-Memory-Code.pptx
+++ b/en/slides/15-Computer_Architecture-Memory-Code.pptx
@@ -123,21 +123,33 @@
   <p:extLst>
     <p:ext uri="{521415D9-36F7-43E2-AB2F-B90AF26B5E84}">
       <p14:sectionLst xmlns:p14="http://schemas.microsoft.com/office/powerpoint/2010/main">
-        <p14:section name="Opening" id="{18c47874-7f4c-58fc-0c02-f21327e05180}">
+        <p14:section name="Opening" id="{89a568fd-91a8-b052-6bce-0a5e77c68a1e}">
           <p14:sldIdLst>
             <p14:sldId id="256"/>
             <p14:sldId id="257"/>
           </p14:sldIdLst>
         </p14:section>
-        <p14:section name="The listings" id="{4ca4cd85-c77e-f2d9-46bd-58cf672a136c}">
+        <p14:section name="Warm-up on the machine" id="{437e94cf-683e-43eb-438e-96360c6becda}">
           <p14:sldIdLst>
             <p14:sldId id="258"/>
+          </p14:sldIdLst>
+        </p14:section>
+        <p14:section name="The main memory" id="{e008f607-d82e-568e-635d-8b6aac69763f}">
+          <p14:sldIdLst>
             <p14:sldId id="259"/>
+          </p14:sldIdLst>
+        </p14:section>
+        <p14:section name="Processor and memory" id="{cca882f2-08cd-9675-96c5-2cda42cea3e5}">
+          <p14:sldIdLst>
             <p14:sldId id="260"/>
+          </p14:sldIdLst>
+        </p14:section>
+        <p14:section name="Memory and input/output" id="{35763a94-5d19-a901-7695-b9537e9261a7}">
+          <p14:sldIdLst>
             <p14:sldId id="261"/>
           </p14:sldIdLst>
         </p14:section>
-        <p14:section name="The complete program" id="{db0f2d34-6dcd-af5b-6e7b-55d1e2fa6d62}">
+        <p14:section name="The complete program" id="{41849516-37a7-6bce-a86d-8e374f9a6542}">
           <p14:sldIdLst>
             <p14:sldId id="262"/>
             <p14:sldId id="263"/>
@@ -146,7 +158,7 @@
             <p14:sldId id="266"/>
           </p14:sldIdLst>
         </p14:section>
-        <p14:section name="Run it and test it" id="{8657784b-7067-11e9-73cf-20e59d403713}">
+        <p14:section name="Run it and test it" id="{0148922e-ec04-9a1c-a07a-79cf2d8688aa}">
           <p14:sldIdLst>
             <p14:sldId id="267"/>
             <p14:sldId id="268"/>
@@ -155,7 +167,7 @@
             <p14:sldId id="271"/>
           </p14:sldIdLst>
         </p14:section>
-        <p14:section name="Exercises" id="{c8b580f8-2014-f6e8-15e3-62a8b9341ab5}">
+        <p14:section name="Exercises" id="{0c404347-fc4b-4f44-6c9d-0b09cf126c18}">
           <p14:sldIdLst>
             <p14:sldId id="272"/>
           </p14:sldIdLst>
@@ -2962,7 +2974,63 @@
       </p:sp>
       <p:sp>
         <p:nvSpPr>
-          <p:cNvPr id="11" name="Shape 9"/>
+          <p:cNvPr id="11" name="Text 9"/>
+          <p:cNvSpPr txBox="1"/>
+          <p:nvPr/>
+        </p:nvSpPr>
+        <p:spPr>
+          <a:xfrm>
+            <a:off x="4693615" y="566928"/>
+            <a:ext cx="6949440" cy="640080"/>
+          </a:xfrm>
+          <a:prstGeom prst="rect">
+            <a:avLst/>
+          </a:prstGeom>
+          <a:noFill/>
+          <a:ln/>
+        </p:spPr>
+        <p:txBody>
+          <a:bodyPr wrap="square" lIns="0" tIns="0" rIns="0" bIns="0" rtlCol="0" anchor="t"/>
+          <a:lstStyle/>
+          <a:p>
+            <a:pPr algn="r" indent="0" marL="0">
+              <a:buNone/>
+            </a:pPr>
+            <a:r>
+              <a:rPr lang="en-US" sz="1300" dirty="0">
+                <a:solidFill>
+                  <a:srgbClr val="CFE3EA"/>
+                </a:solidFill>
+                <a:latin typeface="Calibri" pitchFamily="34" charset="0"/>
+                <a:ea typeface="Calibri" pitchFamily="34" charset="-122"/>
+                <a:cs typeface="Calibri" pitchFamily="34" charset="-120"/>
+              </a:rPr>
+              <a:t>Code deck. The concepts, the figures and the questions are in the lecture deck:</a:t>
+            </a:r>
+            <a:endParaRPr lang="en-US" sz="1300" dirty="0"/>
+          </a:p>
+          <a:p>
+            <a:pPr algn="r" indent="0" marL="0">
+              <a:buNone/>
+            </a:pPr>
+            <a:r>
+              <a:rPr lang="en-US" sz="1300" dirty="0">
+                <a:solidFill>
+                  <a:srgbClr val="CFE3EA"/>
+                </a:solidFill>
+                <a:latin typeface="Calibri" pitchFamily="34" charset="0"/>
+                <a:ea typeface="Calibri" pitchFamily="34" charset="-122"/>
+                <a:cs typeface="Calibri" pitchFamily="34" charset="-120"/>
+              </a:rPr>
+              <a:t>15-Computer_Architecture-Memory.pptx</a:t>
+            </a:r>
+            <a:endParaRPr lang="en-US" sz="1300" dirty="0"/>
+          </a:p>
+        </p:txBody>
+      </p:sp>
+      <p:sp>
+        <p:nvSpPr>
+          <p:cNvPr id="12" name="Shape 10"/>
           <p:cNvSpPr/>
           <p:nvPr/>
         </p:nvSpPr>
@@ -2989,7 +3057,7 @@
       </p:sp>
       <p:pic>
         <p:nvPicPr>
-          <p:cNvPr id="12" name="Image 0" descr="/Users/raffaelemontella/devel/riscv-prg32/computer-architecture-with-prg32/tools/assets/prg32qt_debugger.png">    </p:cNvPr>
+          <p:cNvPr id="13" name="Image 0" descr="/Users/raffaelemontella/devel/riscv-prg32/computer-architecture-with-prg32/tools/assets/prg32qt_debugger.png">    </p:cNvPr>
           <p:cNvPicPr>
             <a:picLocks noChangeAspect="1"/>
           </p:cNvPicPr>

--- a/en/slides/15-Computer_Architecture-Memory-Code.pptx
+++ b/en/slides/15-Computer_Architecture-Memory-Code.pptx
@@ -123,33 +123,33 @@
   <p:extLst>
     <p:ext uri="{521415D9-36F7-43E2-AB2F-B90AF26B5E84}">
       <p14:sectionLst xmlns:p14="http://schemas.microsoft.com/office/powerpoint/2010/main">
-        <p14:section name="Opening" id="{89a568fd-91a8-b052-6bce-0a5e77c68a1e}">
+        <p14:section name="Opening" id="{295f9987-9b54-646c-a076-888da31400cc}">
           <p14:sldIdLst>
             <p14:sldId id="256"/>
             <p14:sldId id="257"/>
           </p14:sldIdLst>
         </p14:section>
-        <p14:section name="Warm-up on the machine" id="{437e94cf-683e-43eb-438e-96360c6becda}">
+        <p14:section name="Warm-up on the machine" id="{57adb3c4-f557-ee27-8dc8-af3c472f331d}">
           <p14:sldIdLst>
             <p14:sldId id="258"/>
           </p14:sldIdLst>
         </p14:section>
-        <p14:section name="The main memory" id="{e008f607-d82e-568e-635d-8b6aac69763f}">
+        <p14:section name="The main memory" id="{b8c913ce-4169-383a-612f-923669d08c12}">
           <p14:sldIdLst>
             <p14:sldId id="259"/>
           </p14:sldIdLst>
         </p14:section>
-        <p14:section name="Processor and memory" id="{cca882f2-08cd-9675-96c5-2cda42cea3e5}">
+        <p14:section name="Processor and memory" id="{47c26b1c-de73-67d9-fd67-34585d7d166e}">
           <p14:sldIdLst>
             <p14:sldId id="260"/>
           </p14:sldIdLst>
         </p14:section>
-        <p14:section name="Memory and input/output" id="{35763a94-5d19-a901-7695-b9537e9261a7}">
+        <p14:section name="Memory and input/output" id="{3393cdbe-5c82-b0d6-f03b-3614f666a185}">
           <p14:sldIdLst>
             <p14:sldId id="261"/>
           </p14:sldIdLst>
         </p14:section>
-        <p14:section name="The complete program" id="{41849516-37a7-6bce-a86d-8e374f9a6542}">
+        <p14:section name="The complete program" id="{89221fb3-342d-94a5-23f0-968ff2bff6a8}">
           <p14:sldIdLst>
             <p14:sldId id="262"/>
             <p14:sldId id="263"/>
@@ -158,7 +158,7 @@
             <p14:sldId id="266"/>
           </p14:sldIdLst>
         </p14:section>
-        <p14:section name="Run it and test it" id="{0148922e-ec04-9a1c-a07a-79cf2d8688aa}">
+        <p14:section name="Run it and test it" id="{0821aa2a-331a-9578-6565-a290e3a342eb}">
           <p14:sldIdLst>
             <p14:sldId id="267"/>
             <p14:sldId id="268"/>
@@ -167,7 +167,7 @@
             <p14:sldId id="271"/>
           </p14:sldIdLst>
         </p14:section>
-        <p14:section name="Exercises" id="{0c404347-fc4b-4f44-6c9d-0b09cf126c18}">
+        <p14:section name="Exercises" id="{22310a69-8e5c-7596-acc3-b8a5e5644ec0}">
           <p14:sldIdLst>
             <p14:sldId id="272"/>
           </p14:sldIdLst>
@@ -576,7 +576,9 @@
           <a:p>
             <a:r>
               <a:rPr lang="en-US" dirty="0"/>
-              <a:t>This is the code deck of Lecture 15. The lecture deck holds the concepts; this one holds everything you type and run: the listings with their explanation, the complete program, what it shows, and the way to test it on each of the three hosts.</a:t>
+              <a:t>This is the code deck of Lecture 15. The lecture deck holds the concepts; this one holds everything you type and run: the listings with their explanation, the complete program, what it shows, and the way to test it on each of the three hosts.
+Learning status: UNDERSTAND NOW, by the end of this lecture you explain it, trace it and apply it on your own; USE NOW, you follow and use the recipe today; how it works inside is explained later, or is not part of the course; UNDERSTAND LATER, recognise the name and what it is for; a later lecture explains it. A slide without a badge is context: a story, an example, a question, an exercise.
+Learning status of this lecture. UNDERSTAND NOW: memories and addresses; little-endian byte order; processor and memory; memory-mapped I/O. USE NOW: the complete program, the PRG32 tools (used, not studied, in this course). UNDERSTAND LATER: nothing. A slide without a badge is context: a story, an example, a question, an exercise.</a:t>
             </a:r>
             <a:endParaRPr lang="en-US" dirty="0"/>
           </a:p>
@@ -665,6 +667,7 @@
             <a:r>
               <a:rPr lang="en-US" dirty="0"/>
               <a:t>One page of the complete program, exactly as it is in the repository. Read it from the top: the header says what the program shows and how to build it; the three functions init, update and draw follow, then the data. Lines that you met in the listings of the lecture have the same comments here.
+USE NOW: the complete program (used, not studied, in this course).
 For the lecturer: code/l15.S, as built and run by the tests. The comments are part of the program: read them with the code.</a:t>
             </a:r>
             <a:endParaRPr lang="en-US" dirty="0"/>
@@ -754,6 +757,7 @@
             <a:r>
               <a:rPr lang="en-US" dirty="0"/>
               <a:t>One page of the complete program, exactly as it is in the repository. Read it from the top: the header says what the program shows and how to build it; the three functions init, update and draw follow, then the data. Lines that you met in the listings of the lecture have the same comments here.
+USE NOW: the complete program (used, not studied, in this course).
 For the lecturer: code/l15.S, as built and run by the tests. The comments are part of the program: read them with the code.</a:t>
             </a:r>
             <a:endParaRPr lang="en-US" dirty="0"/>
@@ -932,6 +936,7 @@
             <a:r>
               <a:rPr lang="en-US" dirty="0"/>
               <a:t>The quickest way: PRG32-QT on your own computer. Four steps, each with its command. PRG32-QT behaves like a board on port 8080, which is why the upload command says esp32c6. With debug mode enabled you can stop at any instruction and read registers and memory.
+USE NOW: the PRG32 tools (used, not studied, in this course).
 For the lecturer: Run by the tests: the cartridge of this slide is built with this command and executed on the headless runner of PRG32-QT. Without the toolchain: import the .prg32 file in PRG32-QT and choose Run Cartridge. Keys: arrows or WASD for the joystick, Z or J for A, X or K for B, Enter for Start, Escape to go back to Setup.</a:t>
             </a:r>
             <a:endParaRPr lang="en-US" dirty="0"/>
@@ -1021,6 +1026,7 @@
             <a:r>
               <a:rPr lang="en-US" dirty="0"/>
               <a:t>The same program on the emulator. QEMU runs the real firmware on an emulated chip, so the cartridge must be built for the architecture qemu. Stage the cartridge while QEMU is closed. The firmware opens on the Setup menu: choose Run Cartridge and the slot. Remember that the keyboard is read by the terminal, not by the window with the picture.
+USE NOW: the PRG32 tools (used, not studied, in this course).
 For the lecturer: Checked by the tests up to the staging: the cartridge is built for the architecture qemu and accepted into the flash image of the emulator. What the emulator then shows is not checked automatically: Espressif QEMU needs its window. Since October 2026 the firmware starts on Setup: choose Run Cartridge, then cart0.</a:t>
             </a:r>
             <a:endParaRPr lang="en-US" dirty="0"/>
@@ -1110,6 +1116,7 @@
             <a:r>
               <a:rPr lang="en-US" dirty="0"/>
               <a:t>The same program on the kit. The firmware is written once, through USB; after that cartridges travel over Wi-Fi. The upload command is the one used for PRG32-QT with the address of the board. This is the only host that the automatic tests do not run: try it, and report what you see.
+USE NOW: the PRG32 tools (used, not studied, in this course).
 For the lecturer: Not run by the tests: there is no board on the test machine. The cartridge for the architecture esp32c6 is built by the tests; the steps are those of the PRG32 documentation. If the serial port is not found pass it explicitly. To use the Wi-Fi of the classroom: python3 -m prg32 wifi set --ssid NAME --password PASSWORD --mode sta.</a:t>
             </a:r>
             <a:endParaRPr lang="en-US" dirty="0"/>
@@ -1199,6 +1206,7 @@
             <a:r>
               <a:rPr lang="en-US" dirty="0"/>
               <a:t>The five most common symptoms, what each means, and what to do. Read the message before changing anything: it nearly always names the cause.
+USE NOW: the PRG32 tools (used, not studied, in this course).
 For the lecturer: The first three rows cover most cases. When asking for help, paste the command and the whole message as text. docs/usage/troubleshooting.md of the PRG32 repository has the complete list.</a:t>
             </a:r>
             <a:endParaRPr lang="en-US" dirty="0"/>
@@ -1466,6 +1474,7 @@
             <a:r>
               <a:rPr lang="en-US" dirty="0"/>
               <a:t>value is a word that contains 0x12345678. lw loads all of it into t1. Then three lbu instructions load single bytes, at the address of the word, at that address plus 1 and plus 3: they give 0x78, 0x56 and 0x12. Two facts follow. A word occupies four consecutive addresses, because memory is addressed byte by byte. And the byte at the lowest address is the least significant: the little-endian order. Open the memory view of PRG32-QT at the address in t0 and you see 78 56 34 12.
+UNDERSTAND NOW: memories and addresses.
 For the lecturer: Run it in PRG32-QT and open the memory view at the address in t0: the bytes appear as 78 56 34 12. The byte-order slide of Lecture 04 becomes an experiment.</a:t>
             </a:r>
             <a:endParaRPr lang="en-US" dirty="0"/>
@@ -1555,6 +1564,7 @@
             <a:r>
               <a:rPr lang="en-US" dirty="0"/>
               <a:t>A word is aligned when it starts at an address that is a multiple of its size: a multiple of 4 for 32-bit words. An aligned word is fetched with a single access; an unaligned one straddles two memory words. In RISC-V the assembler aligns .word data for you, and a load from a misaligned address is, depending on the processor, slower or refused. The code on the right shows the typical case: after a string of six bytes, .balign 4 skips two bytes so that the next word is aligned.
+UNDERSTAND NOW: memories and addresses.
 For the lecturer: The original deck: the MC68000 does not allow unaligned words, Intel x86 allows them at the cost of two accesses. The RISC-V specification leaves the choice to the implementation: correct programs keep their data aligned.</a:t>
             </a:r>
             <a:endParaRPr lang="en-US" dirty="0"/>
@@ -1644,6 +1654,7 @@
             <a:r>
               <a:rPr lang="en-US" dirty="0"/>
               <a:t>The six steps of lw t1, 0(t0). The ALU computes the address and puts it in MA. MA drives the address bus. The control unit raises read enable. The memory decodes the address and puts the word on the data bus. The datum is captured in MB. MB is copied into t1. A store is symmetrical: the address goes to MA, the datum to MB, write enable is raised, and the memory stores what it finds on the data bus. The access time is what elapses between the second and the fifth step.
+UNDERSTAND NOW: processor and memory.
 For the lecturer: A store, sw t1, 0(t0), is symmetrical: address in MA, datum in MB, write enable raised, and the memory latches the datum. The access time is the time between step 2 and step 5.</a:t>
             </a:r>
             <a:endParaRPr lang="en-US" dirty="0"/>
@@ -1733,6 +1744,7 @@
             <a:r>
               <a:rPr lang="en-US" dirty="0"/>
               <a:t>A simplified map of the addresses of the ESP32-C6. Addresses that begin with 0x4000 are the ROM with the code that starts the chip; 0x4080 is the SRAM, where your cartridge is loaded; 0x4200 is the external flash with the firmware; 0x6000 are the registers of the peripherals. The same thirty-two address lines reach everything, and the same lw and sw operate everything. The cartridge address you saw in the debugger, 0x40800000, is the beginning of the RAM.
+UNDERSTAND NOW: memory-mapped I/O.
 For the lecturer: Simplified from the ESP32-C6 technical reference manual; check the manual before relying on an address. The point for the students: the same thirty-two address lines reach ROM, RAM, flash and every device, and the same lw and sw operate them.</a:t>
             </a:r>
             <a:endParaRPr lang="en-US" dirty="0"/>
@@ -1822,6 +1834,7 @@
             <a:r>
               <a:rPr lang="en-US" dirty="0"/>
               <a:t>One page of the complete program, exactly as it is in the repository. Read it from the top: the header says what the program shows and how to build it; the three functions init, update and draw follow, then the data. Lines that you met in the listings of the lecture have the same comments here.
+USE NOW: the complete program (used, not studied, in this course).
 For the lecturer: code/l15.S, as built and run by the tests. The comments are part of the program: read them with the code.</a:t>
             </a:r>
             <a:endParaRPr lang="en-US" dirty="0"/>
@@ -1911,6 +1924,7 @@
             <a:r>
               <a:rPr lang="en-US" dirty="0"/>
               <a:t>One page of the complete program, exactly as it is in the repository. Read it from the top: the header says what the program shows and how to build it; the three functions init, update and draw follow, then the data. Lines that you met in the listings of the lecture have the same comments here.
+USE NOW: the complete program (used, not studied, in this course).
 For the lecturer: code/l15.S, as built and run by the tests. The comments are part of the program: read them with the code.</a:t>
             </a:r>
             <a:endParaRPr lang="en-US" dirty="0"/>
@@ -2000,6 +2014,7 @@
             <a:r>
               <a:rPr lang="en-US" dirty="0"/>
               <a:t>One page of the complete program, exactly as it is in the repository. Read it from the top: the header says what the program shows and how to build it; the three functions init, update and draw follow, then the data. Lines that you met in the listings of the lecture have the same comments here.
+USE NOW: the complete program (used, not studied, in this course).
 For the lecturer: code/l15.S, as built and run by the tests. The comments are part of the program: read them with the code.</a:t>
             </a:r>
             <a:endParaRPr lang="en-US" dirty="0"/>
@@ -3081,6 +3096,420 @@
       </p:pic>
       <p:sp>
         <p:nvSpPr>
+          <p:cNvPr id="14" name="Shape 11"/>
+          <p:cNvSpPr/>
+          <p:nvPr/>
+        </p:nvSpPr>
+        <p:spPr>
+          <a:xfrm>
+            <a:off x="9690303" y="91440"/>
+            <a:ext cx="1952752" cy="274320"/>
+          </a:xfrm>
+          <a:prstGeom prst="rect">
+            <a:avLst/>
+          </a:prstGeom>
+          <a:solidFill>
+            <a:srgbClr val="F3E8FF"/>
+          </a:solidFill>
+          <a:ln w="12700">
+            <a:solidFill>
+              <a:srgbClr val="7E22CE"/>
+            </a:solidFill>
+            <a:prstDash val="dash"/>
+          </a:ln>
+        </p:spPr>
+      </p:sp>
+      <p:sp>
+        <p:nvSpPr>
+          <p:cNvPr id="15" name="Shape 12"/>
+          <p:cNvSpPr/>
+          <p:nvPr/>
+        </p:nvSpPr>
+        <p:spPr>
+          <a:xfrm>
+            <a:off x="9717735" y="128016"/>
+            <a:ext cx="45720" cy="45720"/>
+          </a:xfrm>
+          <a:prstGeom prst="rect">
+            <a:avLst/>
+          </a:prstGeom>
+          <a:solidFill>
+            <a:srgbClr val="7E22CE"/>
+          </a:solidFill>
+          <a:ln w="12700">
+            <a:solidFill>
+              <a:srgbClr val="7E22CE"/>
+            </a:solidFill>
+            <a:prstDash val="solid"/>
+          </a:ln>
+        </p:spPr>
+      </p:sp>
+      <p:sp>
+        <p:nvSpPr>
+          <p:cNvPr id="16" name="Shape 13"/>
+          <p:cNvSpPr/>
+          <p:nvPr/>
+        </p:nvSpPr>
+        <p:spPr>
+          <a:xfrm>
+            <a:off x="9717735" y="205740"/>
+            <a:ext cx="45720" cy="45720"/>
+          </a:xfrm>
+          <a:prstGeom prst="rect">
+            <a:avLst/>
+          </a:prstGeom>
+          <a:solidFill>
+            <a:srgbClr val="7E22CE"/>
+          </a:solidFill>
+          <a:ln w="12700">
+            <a:solidFill>
+              <a:srgbClr val="7E22CE"/>
+            </a:solidFill>
+            <a:prstDash val="solid"/>
+          </a:ln>
+        </p:spPr>
+      </p:sp>
+      <p:sp>
+        <p:nvSpPr>
+          <p:cNvPr id="17" name="Shape 14"/>
+          <p:cNvSpPr/>
+          <p:nvPr/>
+        </p:nvSpPr>
+        <p:spPr>
+          <a:xfrm>
+            <a:off x="9717735" y="283464"/>
+            <a:ext cx="45720" cy="45720"/>
+          </a:xfrm>
+          <a:prstGeom prst="rect">
+            <a:avLst/>
+          </a:prstGeom>
+          <a:solidFill>
+            <a:srgbClr val="7E22CE"/>
+          </a:solidFill>
+          <a:ln w="12700">
+            <a:solidFill>
+              <a:srgbClr val="7E22CE"/>
+            </a:solidFill>
+            <a:prstDash val="solid"/>
+          </a:ln>
+        </p:spPr>
+      </p:sp>
+      <p:pic>
+        <p:nvPicPr>
+          <p:cNvPr id="18" name="Image 1" descr="preencoded.png">    </p:cNvPr>
+          <p:cNvPicPr>
+            <a:picLocks noChangeAspect="1"/>
+          </p:cNvPicPr>
+          <p:nvPr/>
+        </p:nvPicPr>
+        <p:blipFill>
+          <a:blip r:embed="rId2"/>
+          <a:stretch>
+            <a:fillRect/>
+          </a:stretch>
+        </p:blipFill>
+        <p:spPr>
+          <a:xfrm>
+            <a:off x="9818319" y="128016"/>
+            <a:ext cx="201168" cy="201168"/>
+          </a:xfrm>
+          <a:prstGeom prst="rect">
+            <a:avLst/>
+          </a:prstGeom>
+        </p:spPr>
+      </p:pic>
+      <p:sp>
+        <p:nvSpPr>
+          <p:cNvPr id="19" name="Text 15"/>
+          <p:cNvSpPr txBox="1"/>
+          <p:nvPr/>
+        </p:nvSpPr>
+        <p:spPr>
+          <a:xfrm>
+            <a:off x="10074351" y="91440"/>
+            <a:ext cx="1532128" cy="274320"/>
+          </a:xfrm>
+          <a:prstGeom prst="rect">
+            <a:avLst/>
+          </a:prstGeom>
+          <a:noFill/>
+          <a:ln/>
+        </p:spPr>
+        <p:txBody>
+          <a:bodyPr wrap="square" lIns="0" tIns="0" rIns="0" bIns="0" rtlCol="0" anchor="ctr"/>
+          <a:lstStyle/>
+          <a:p>
+            <a:pPr indent="0" marL="0">
+              <a:buNone/>
+            </a:pPr>
+            <a:r>
+              <a:rPr lang="en-US" sz="1100" b="1" dirty="0">
+                <a:solidFill>
+                  <a:srgbClr val="6B21A8"/>
+                </a:solidFill>
+                <a:latin typeface="Calibri" pitchFamily="34" charset="0"/>
+                <a:ea typeface="Calibri" pitchFamily="34" charset="-122"/>
+                <a:cs typeface="Calibri" pitchFamily="34" charset="-120"/>
+              </a:rPr>
+              <a:t>UNDERSTAND LATER</a:t>
+            </a:r>
+            <a:endParaRPr lang="en-US" sz="1100" dirty="0"/>
+          </a:p>
+        </p:txBody>
+      </p:sp>
+      <p:sp>
+        <p:nvSpPr>
+          <p:cNvPr id="20" name="Shape 16"/>
+          <p:cNvSpPr/>
+          <p:nvPr/>
+        </p:nvSpPr>
+        <p:spPr>
+          <a:xfrm>
+            <a:off x="8407349" y="91440"/>
+            <a:ext cx="1173226" cy="274320"/>
+          </a:xfrm>
+          <a:prstGeom prst="rect">
+            <a:avLst/>
+          </a:prstGeom>
+          <a:solidFill>
+            <a:srgbClr val="FEF3C7"/>
+          </a:solidFill>
+          <a:ln w="12700">
+            <a:solidFill>
+              <a:srgbClr val="B45309"/>
+            </a:solidFill>
+            <a:prstDash val="solid"/>
+          </a:ln>
+        </p:spPr>
+      </p:sp>
+      <p:sp>
+        <p:nvSpPr>
+          <p:cNvPr id="21" name="Shape 17"/>
+          <p:cNvSpPr/>
+          <p:nvPr/>
+        </p:nvSpPr>
+        <p:spPr>
+          <a:xfrm>
+            <a:off x="8407349" y="91440"/>
+            <a:ext cx="27432" cy="274320"/>
+          </a:xfrm>
+          <a:prstGeom prst="rect">
+            <a:avLst/>
+          </a:prstGeom>
+          <a:solidFill>
+            <a:srgbClr val="B45309"/>
+          </a:solidFill>
+          <a:ln w="12700">
+            <a:solidFill>
+              <a:srgbClr val="B45309"/>
+            </a:solidFill>
+            <a:prstDash val="solid"/>
+          </a:ln>
+        </p:spPr>
+      </p:sp>
+      <p:sp>
+        <p:nvSpPr>
+          <p:cNvPr id="22" name="Shape 18"/>
+          <p:cNvSpPr/>
+          <p:nvPr/>
+        </p:nvSpPr>
+        <p:spPr>
+          <a:xfrm>
+            <a:off x="8462213" y="91440"/>
+            <a:ext cx="27432" cy="274320"/>
+          </a:xfrm>
+          <a:prstGeom prst="rect">
+            <a:avLst/>
+          </a:prstGeom>
+          <a:solidFill>
+            <a:srgbClr val="B45309"/>
+          </a:solidFill>
+          <a:ln w="12700">
+            <a:solidFill>
+              <a:srgbClr val="B45309"/>
+            </a:solidFill>
+            <a:prstDash val="solid"/>
+          </a:ln>
+        </p:spPr>
+      </p:sp>
+      <p:pic>
+        <p:nvPicPr>
+          <p:cNvPr id="23" name="Image 2" descr="preencoded.png">    </p:cNvPr>
+          <p:cNvPicPr>
+            <a:picLocks noChangeAspect="1"/>
+          </p:cNvPicPr>
+          <p:nvPr/>
+        </p:nvPicPr>
+        <p:blipFill>
+          <a:blip r:embed="rId3"/>
+          <a:stretch>
+            <a:fillRect/>
+          </a:stretch>
+        </p:blipFill>
+        <p:spPr>
+          <a:xfrm>
+            <a:off x="8535365" y="128016"/>
+            <a:ext cx="201168" cy="201168"/>
+          </a:xfrm>
+          <a:prstGeom prst="rect">
+            <a:avLst/>
+          </a:prstGeom>
+        </p:spPr>
+      </p:pic>
+      <p:sp>
+        <p:nvSpPr>
+          <p:cNvPr id="24" name="Text 19"/>
+          <p:cNvSpPr txBox="1"/>
+          <p:nvPr/>
+        </p:nvSpPr>
+        <p:spPr>
+          <a:xfrm>
+            <a:off x="8791397" y="91440"/>
+            <a:ext cx="752602" cy="274320"/>
+          </a:xfrm>
+          <a:prstGeom prst="rect">
+            <a:avLst/>
+          </a:prstGeom>
+          <a:noFill/>
+          <a:ln/>
+        </p:spPr>
+        <p:txBody>
+          <a:bodyPr wrap="square" lIns="0" tIns="0" rIns="0" bIns="0" rtlCol="0" anchor="ctr"/>
+          <a:lstStyle/>
+          <a:p>
+            <a:pPr indent="0" marL="0">
+              <a:buNone/>
+            </a:pPr>
+            <a:r>
+              <a:rPr lang="en-US" sz="1100" b="1" dirty="0">
+                <a:solidFill>
+                  <a:srgbClr val="92400E"/>
+                </a:solidFill>
+                <a:latin typeface="Calibri" pitchFamily="34" charset="0"/>
+                <a:ea typeface="Calibri" pitchFamily="34" charset="-122"/>
+                <a:cs typeface="Calibri" pitchFamily="34" charset="-120"/>
+              </a:rPr>
+              <a:t>USE NOW</a:t>
+            </a:r>
+            <a:endParaRPr lang="en-US" sz="1100" dirty="0"/>
+          </a:p>
+        </p:txBody>
+      </p:sp>
+      <p:sp>
+        <p:nvSpPr>
+          <p:cNvPr id="25" name="Shape 20"/>
+          <p:cNvSpPr/>
+          <p:nvPr/>
+        </p:nvSpPr>
+        <p:spPr>
+          <a:xfrm>
+            <a:off x="6518097" y="91440"/>
+            <a:ext cx="1779524" cy="274320"/>
+          </a:xfrm>
+          <a:prstGeom prst="rect">
+            <a:avLst/>
+          </a:prstGeom>
+          <a:solidFill>
+            <a:srgbClr val="E0F2FE"/>
+          </a:solidFill>
+          <a:ln w="12700">
+            <a:solidFill>
+              <a:srgbClr val="0369A1"/>
+            </a:solidFill>
+            <a:prstDash val="solid"/>
+          </a:ln>
+        </p:spPr>
+      </p:sp>
+      <p:sp>
+        <p:nvSpPr>
+          <p:cNvPr id="26" name="Shape 21"/>
+          <p:cNvSpPr/>
+          <p:nvPr/>
+        </p:nvSpPr>
+        <p:spPr>
+          <a:xfrm>
+            <a:off x="6518097" y="91440"/>
+            <a:ext cx="73152" cy="274320"/>
+          </a:xfrm>
+          <a:prstGeom prst="rect">
+            <a:avLst/>
+          </a:prstGeom>
+          <a:solidFill>
+            <a:srgbClr val="0369A1"/>
+          </a:solidFill>
+          <a:ln w="12700">
+            <a:solidFill>
+              <a:srgbClr val="0369A1"/>
+            </a:solidFill>
+            <a:prstDash val="solid"/>
+          </a:ln>
+        </p:spPr>
+      </p:sp>
+      <p:pic>
+        <p:nvPicPr>
+          <p:cNvPr id="27" name="Image 3" descr="preencoded.png">    </p:cNvPr>
+          <p:cNvPicPr>
+            <a:picLocks noChangeAspect="1"/>
+          </p:cNvPicPr>
+          <p:nvPr/>
+        </p:nvPicPr>
+        <p:blipFill>
+          <a:blip r:embed="rId4"/>
+          <a:stretch>
+            <a:fillRect/>
+          </a:stretch>
+        </p:blipFill>
+        <p:spPr>
+          <a:xfrm>
+            <a:off x="6646113" y="128016"/>
+            <a:ext cx="201168" cy="201168"/>
+          </a:xfrm>
+          <a:prstGeom prst="rect">
+            <a:avLst/>
+          </a:prstGeom>
+        </p:spPr>
+      </p:pic>
+      <p:sp>
+        <p:nvSpPr>
+          <p:cNvPr id="28" name="Text 22"/>
+          <p:cNvSpPr txBox="1"/>
+          <p:nvPr/>
+        </p:nvSpPr>
+        <p:spPr>
+          <a:xfrm>
+            <a:off x="6902145" y="91440"/>
+            <a:ext cx="1358900" cy="274320"/>
+          </a:xfrm>
+          <a:prstGeom prst="rect">
+            <a:avLst/>
+          </a:prstGeom>
+          <a:noFill/>
+          <a:ln/>
+        </p:spPr>
+        <p:txBody>
+          <a:bodyPr wrap="square" lIns="0" tIns="0" rIns="0" bIns="0" rtlCol="0" anchor="ctr"/>
+          <a:lstStyle/>
+          <a:p>
+            <a:pPr indent="0" marL="0">
+              <a:buNone/>
+            </a:pPr>
+            <a:r>
+              <a:rPr lang="en-US" sz="1100" b="1" dirty="0">
+                <a:solidFill>
+                  <a:srgbClr val="075985"/>
+                </a:solidFill>
+                <a:latin typeface="Calibri" pitchFamily="34" charset="0"/>
+                <a:ea typeface="Calibri" pitchFamily="34" charset="-122"/>
+                <a:cs typeface="Calibri" pitchFamily="34" charset="-120"/>
+              </a:rPr>
+              <a:t>UNDERSTAND NOW</a:t>
+            </a:r>
+            <a:endParaRPr lang="en-US" sz="1100" dirty="0"/>
+          </a:p>
+        </p:txBody>
+      </p:sp>
+      <p:sp>
+        <p:nvSpPr>
           <p:cNvPr id="25" name="Slide Number Placeholder 0"/>
           <p:cNvSpPr>
             <a:spLocks noGrp="1"/>
@@ -3792,6 +4221,158 @@
       </p:sp>
       <p:sp>
         <p:nvSpPr>
+          <p:cNvPr id="5" name="Shape 3"/>
+          <p:cNvSpPr/>
+          <p:nvPr/>
+        </p:nvSpPr>
+        <p:spPr>
+          <a:xfrm>
+            <a:off x="8959672" y="91440"/>
+            <a:ext cx="2683383" cy="274320"/>
+          </a:xfrm>
+          <a:prstGeom prst="rect">
+            <a:avLst/>
+          </a:prstGeom>
+          <a:solidFill>
+            <a:srgbClr val="FEF3C7"/>
+          </a:solidFill>
+          <a:ln w="12700">
+            <a:solidFill>
+              <a:srgbClr val="B45309"/>
+            </a:solidFill>
+            <a:prstDash val="solid"/>
+          </a:ln>
+        </p:spPr>
+      </p:sp>
+      <p:sp>
+        <p:nvSpPr>
+          <p:cNvPr id="6" name="Shape 4"/>
+          <p:cNvSpPr/>
+          <p:nvPr/>
+        </p:nvSpPr>
+        <p:spPr>
+          <a:xfrm>
+            <a:off x="8959672" y="91440"/>
+            <a:ext cx="27432" cy="274320"/>
+          </a:xfrm>
+          <a:prstGeom prst="rect">
+            <a:avLst/>
+          </a:prstGeom>
+          <a:solidFill>
+            <a:srgbClr val="B45309"/>
+          </a:solidFill>
+          <a:ln w="12700">
+            <a:solidFill>
+              <a:srgbClr val="B45309"/>
+            </a:solidFill>
+            <a:prstDash val="solid"/>
+          </a:ln>
+        </p:spPr>
+      </p:sp>
+      <p:sp>
+        <p:nvSpPr>
+          <p:cNvPr id="7" name="Shape 5"/>
+          <p:cNvSpPr/>
+          <p:nvPr/>
+        </p:nvSpPr>
+        <p:spPr>
+          <a:xfrm>
+            <a:off x="9014536" y="91440"/>
+            <a:ext cx="27432" cy="274320"/>
+          </a:xfrm>
+          <a:prstGeom prst="rect">
+            <a:avLst/>
+          </a:prstGeom>
+          <a:solidFill>
+            <a:srgbClr val="B45309"/>
+          </a:solidFill>
+          <a:ln w="12700">
+            <a:solidFill>
+              <a:srgbClr val="B45309"/>
+            </a:solidFill>
+            <a:prstDash val="solid"/>
+          </a:ln>
+        </p:spPr>
+      </p:sp>
+      <p:pic>
+        <p:nvPicPr>
+          <p:cNvPr id="8" name="Image 0" descr="preencoded.png">    </p:cNvPr>
+          <p:cNvPicPr>
+            <a:picLocks noChangeAspect="1"/>
+          </p:cNvPicPr>
+          <p:nvPr/>
+        </p:nvPicPr>
+        <p:blipFill>
+          <a:blip r:embed="rId1"/>
+          <a:stretch>
+            <a:fillRect/>
+          </a:stretch>
+        </p:blipFill>
+        <p:spPr>
+          <a:xfrm>
+            <a:off x="9087688" y="128016"/>
+            <a:ext cx="201168" cy="201168"/>
+          </a:xfrm>
+          <a:prstGeom prst="rect">
+            <a:avLst/>
+          </a:prstGeom>
+        </p:spPr>
+      </p:pic>
+      <p:sp>
+        <p:nvSpPr>
+          <p:cNvPr id="9" name="Text 6"/>
+          <p:cNvSpPr txBox="1"/>
+          <p:nvPr/>
+        </p:nvSpPr>
+        <p:spPr>
+          <a:xfrm>
+            <a:off x="9343720" y="91440"/>
+            <a:ext cx="2262759" cy="274320"/>
+          </a:xfrm>
+          <a:prstGeom prst="rect">
+            <a:avLst/>
+          </a:prstGeom>
+          <a:noFill/>
+          <a:ln/>
+        </p:spPr>
+        <p:txBody>
+          <a:bodyPr wrap="square" lIns="0" tIns="0" rIns="0" bIns="0" rtlCol="0" anchor="ctr"/>
+          <a:lstStyle/>
+          <a:p>
+            <a:pPr indent="0" marL="0">
+              <a:buNone/>
+            </a:pPr>
+            <a:r>
+              <a:rPr lang="en-US" sz="1100" b="1" dirty="0">
+                <a:solidFill>
+                  <a:srgbClr val="92400E"/>
+                </a:solidFill>
+                <a:latin typeface="Calibri" pitchFamily="34" charset="0"/>
+                <a:ea typeface="Calibri" pitchFamily="34" charset="-122"/>
+                <a:cs typeface="Calibri" pitchFamily="34" charset="-120"/>
+              </a:rPr>
+              <a:t>USE NOW</a:t>
+            </a:r>
+            <a:pPr indent="0" marL="0">
+              <a:buNone/>
+            </a:pPr>
+            <a:r>
+              <a:rPr lang="en-US" sz="1100" dirty="0">
+                <a:solidFill>
+                  <a:srgbClr val="92400E"/>
+                </a:solidFill>
+                <a:latin typeface="Calibri" pitchFamily="34" charset="0"/>
+                <a:ea typeface="Calibri" pitchFamily="34" charset="-122"/>
+                <a:cs typeface="Calibri" pitchFamily="34" charset="-120"/>
+              </a:rPr>
+              <a:t> · the complete program</a:t>
+            </a:r>
+            <a:endParaRPr lang="en-US" sz="1100" dirty="0"/>
+          </a:p>
+        </p:txBody>
+      </p:sp>
+      <p:sp>
+        <p:nvSpPr>
           <p:cNvPr id="25" name="Slide Number Placeholder 0"/>
           <p:cNvSpPr>
             <a:spLocks noGrp="1"/>
@@ -4176,6 +4757,158 @@
       </p:sp>
       <p:sp>
         <p:nvSpPr>
+          <p:cNvPr id="5" name="Shape 3"/>
+          <p:cNvSpPr/>
+          <p:nvPr/>
+        </p:nvSpPr>
+        <p:spPr>
+          <a:xfrm>
+            <a:off x="8959672" y="91440"/>
+            <a:ext cx="2683383" cy="274320"/>
+          </a:xfrm>
+          <a:prstGeom prst="rect">
+            <a:avLst/>
+          </a:prstGeom>
+          <a:solidFill>
+            <a:srgbClr val="FEF3C7"/>
+          </a:solidFill>
+          <a:ln w="12700">
+            <a:solidFill>
+              <a:srgbClr val="B45309"/>
+            </a:solidFill>
+            <a:prstDash val="solid"/>
+          </a:ln>
+        </p:spPr>
+      </p:sp>
+      <p:sp>
+        <p:nvSpPr>
+          <p:cNvPr id="6" name="Shape 4"/>
+          <p:cNvSpPr/>
+          <p:nvPr/>
+        </p:nvSpPr>
+        <p:spPr>
+          <a:xfrm>
+            <a:off x="8959672" y="91440"/>
+            <a:ext cx="27432" cy="274320"/>
+          </a:xfrm>
+          <a:prstGeom prst="rect">
+            <a:avLst/>
+          </a:prstGeom>
+          <a:solidFill>
+            <a:srgbClr val="B45309"/>
+          </a:solidFill>
+          <a:ln w="12700">
+            <a:solidFill>
+              <a:srgbClr val="B45309"/>
+            </a:solidFill>
+            <a:prstDash val="solid"/>
+          </a:ln>
+        </p:spPr>
+      </p:sp>
+      <p:sp>
+        <p:nvSpPr>
+          <p:cNvPr id="7" name="Shape 5"/>
+          <p:cNvSpPr/>
+          <p:nvPr/>
+        </p:nvSpPr>
+        <p:spPr>
+          <a:xfrm>
+            <a:off x="9014536" y="91440"/>
+            <a:ext cx="27432" cy="274320"/>
+          </a:xfrm>
+          <a:prstGeom prst="rect">
+            <a:avLst/>
+          </a:prstGeom>
+          <a:solidFill>
+            <a:srgbClr val="B45309"/>
+          </a:solidFill>
+          <a:ln w="12700">
+            <a:solidFill>
+              <a:srgbClr val="B45309"/>
+            </a:solidFill>
+            <a:prstDash val="solid"/>
+          </a:ln>
+        </p:spPr>
+      </p:sp>
+      <p:pic>
+        <p:nvPicPr>
+          <p:cNvPr id="8" name="Image 0" descr="preencoded.png">    </p:cNvPr>
+          <p:cNvPicPr>
+            <a:picLocks noChangeAspect="1"/>
+          </p:cNvPicPr>
+          <p:nvPr/>
+        </p:nvPicPr>
+        <p:blipFill>
+          <a:blip r:embed="rId1"/>
+          <a:stretch>
+            <a:fillRect/>
+          </a:stretch>
+        </p:blipFill>
+        <p:spPr>
+          <a:xfrm>
+            <a:off x="9087688" y="128016"/>
+            <a:ext cx="201168" cy="201168"/>
+          </a:xfrm>
+          <a:prstGeom prst="rect">
+            <a:avLst/>
+          </a:prstGeom>
+        </p:spPr>
+      </p:pic>
+      <p:sp>
+        <p:nvSpPr>
+          <p:cNvPr id="9" name="Text 6"/>
+          <p:cNvSpPr txBox="1"/>
+          <p:nvPr/>
+        </p:nvSpPr>
+        <p:spPr>
+          <a:xfrm>
+            <a:off x="9343720" y="91440"/>
+            <a:ext cx="2262759" cy="274320"/>
+          </a:xfrm>
+          <a:prstGeom prst="rect">
+            <a:avLst/>
+          </a:prstGeom>
+          <a:noFill/>
+          <a:ln/>
+        </p:spPr>
+        <p:txBody>
+          <a:bodyPr wrap="square" lIns="0" tIns="0" rIns="0" bIns="0" rtlCol="0" anchor="ctr"/>
+          <a:lstStyle/>
+          <a:p>
+            <a:pPr indent="0" marL="0">
+              <a:buNone/>
+            </a:pPr>
+            <a:r>
+              <a:rPr lang="en-US" sz="1100" b="1" dirty="0">
+                <a:solidFill>
+                  <a:srgbClr val="92400E"/>
+                </a:solidFill>
+                <a:latin typeface="Calibri" pitchFamily="34" charset="0"/>
+                <a:ea typeface="Calibri" pitchFamily="34" charset="-122"/>
+                <a:cs typeface="Calibri" pitchFamily="34" charset="-120"/>
+              </a:rPr>
+              <a:t>USE NOW</a:t>
+            </a:r>
+            <a:pPr indent="0" marL="0">
+              <a:buNone/>
+            </a:pPr>
+            <a:r>
+              <a:rPr lang="en-US" sz="1100" dirty="0">
+                <a:solidFill>
+                  <a:srgbClr val="92400E"/>
+                </a:solidFill>
+                <a:latin typeface="Calibri" pitchFamily="34" charset="0"/>
+                <a:ea typeface="Calibri" pitchFamily="34" charset="-122"/>
+                <a:cs typeface="Calibri" pitchFamily="34" charset="-120"/>
+              </a:rPr>
+              <a:t> · the complete program</a:t>
+            </a:r>
+            <a:endParaRPr lang="en-US" sz="1100" dirty="0"/>
+          </a:p>
+        </p:txBody>
+      </p:sp>
+      <p:sp>
+        <p:nvSpPr>
           <p:cNvPr id="25" name="Slide Number Placeholder 0"/>
           <p:cNvSpPr>
             <a:spLocks noGrp="1"/>
@@ -5329,6 +6062,158 @@
       </p:sp>
       <p:sp>
         <p:nvSpPr>
+          <p:cNvPr id="17" name="Shape 15"/>
+          <p:cNvSpPr/>
+          <p:nvPr/>
+        </p:nvSpPr>
+        <p:spPr>
+          <a:xfrm>
+            <a:off x="9287967" y="91440"/>
+            <a:ext cx="2355088" cy="274320"/>
+          </a:xfrm>
+          <a:prstGeom prst="rect">
+            <a:avLst/>
+          </a:prstGeom>
+          <a:solidFill>
+            <a:srgbClr val="FEF3C7"/>
+          </a:solidFill>
+          <a:ln w="12700">
+            <a:solidFill>
+              <a:srgbClr val="B45309"/>
+            </a:solidFill>
+            <a:prstDash val="solid"/>
+          </a:ln>
+        </p:spPr>
+      </p:sp>
+      <p:sp>
+        <p:nvSpPr>
+          <p:cNvPr id="18" name="Shape 16"/>
+          <p:cNvSpPr/>
+          <p:nvPr/>
+        </p:nvSpPr>
+        <p:spPr>
+          <a:xfrm>
+            <a:off x="9287967" y="91440"/>
+            <a:ext cx="27432" cy="274320"/>
+          </a:xfrm>
+          <a:prstGeom prst="rect">
+            <a:avLst/>
+          </a:prstGeom>
+          <a:solidFill>
+            <a:srgbClr val="B45309"/>
+          </a:solidFill>
+          <a:ln w="12700">
+            <a:solidFill>
+              <a:srgbClr val="B45309"/>
+            </a:solidFill>
+            <a:prstDash val="solid"/>
+          </a:ln>
+        </p:spPr>
+      </p:sp>
+      <p:sp>
+        <p:nvSpPr>
+          <p:cNvPr id="19" name="Shape 17"/>
+          <p:cNvSpPr/>
+          <p:nvPr/>
+        </p:nvSpPr>
+        <p:spPr>
+          <a:xfrm>
+            <a:off x="9342831" y="91440"/>
+            <a:ext cx="27432" cy="274320"/>
+          </a:xfrm>
+          <a:prstGeom prst="rect">
+            <a:avLst/>
+          </a:prstGeom>
+          <a:solidFill>
+            <a:srgbClr val="B45309"/>
+          </a:solidFill>
+          <a:ln w="12700">
+            <a:solidFill>
+              <a:srgbClr val="B45309"/>
+            </a:solidFill>
+            <a:prstDash val="solid"/>
+          </a:ln>
+        </p:spPr>
+      </p:sp>
+      <p:pic>
+        <p:nvPicPr>
+          <p:cNvPr id="20" name="Image 0" descr="preencoded.png">    </p:cNvPr>
+          <p:cNvPicPr>
+            <a:picLocks noChangeAspect="1"/>
+          </p:cNvPicPr>
+          <p:nvPr/>
+        </p:nvPicPr>
+        <p:blipFill>
+          <a:blip r:embed="rId1"/>
+          <a:stretch>
+            <a:fillRect/>
+          </a:stretch>
+        </p:blipFill>
+        <p:spPr>
+          <a:xfrm>
+            <a:off x="9415983" y="128016"/>
+            <a:ext cx="201168" cy="201168"/>
+          </a:xfrm>
+          <a:prstGeom prst="rect">
+            <a:avLst/>
+          </a:prstGeom>
+        </p:spPr>
+      </p:pic>
+      <p:sp>
+        <p:nvSpPr>
+          <p:cNvPr id="21" name="Text 18"/>
+          <p:cNvSpPr txBox="1"/>
+          <p:nvPr/>
+        </p:nvSpPr>
+        <p:spPr>
+          <a:xfrm>
+            <a:off x="9672015" y="91440"/>
+            <a:ext cx="1934464" cy="274320"/>
+          </a:xfrm>
+          <a:prstGeom prst="rect">
+            <a:avLst/>
+          </a:prstGeom>
+          <a:noFill/>
+          <a:ln/>
+        </p:spPr>
+        <p:txBody>
+          <a:bodyPr wrap="square" lIns="0" tIns="0" rIns="0" bIns="0" rtlCol="0" anchor="ctr"/>
+          <a:lstStyle/>
+          <a:p>
+            <a:pPr indent="0" marL="0">
+              <a:buNone/>
+            </a:pPr>
+            <a:r>
+              <a:rPr lang="en-US" sz="1100" b="1" dirty="0">
+                <a:solidFill>
+                  <a:srgbClr val="92400E"/>
+                </a:solidFill>
+                <a:latin typeface="Calibri" pitchFamily="34" charset="0"/>
+                <a:ea typeface="Calibri" pitchFamily="34" charset="-122"/>
+                <a:cs typeface="Calibri" pitchFamily="34" charset="-120"/>
+              </a:rPr>
+              <a:t>USE NOW</a:t>
+            </a:r>
+            <a:pPr indent="0" marL="0">
+              <a:buNone/>
+            </a:pPr>
+            <a:r>
+              <a:rPr lang="en-US" sz="1100" dirty="0">
+                <a:solidFill>
+                  <a:srgbClr val="92400E"/>
+                </a:solidFill>
+                <a:latin typeface="Calibri" pitchFamily="34" charset="0"/>
+                <a:ea typeface="Calibri" pitchFamily="34" charset="-122"/>
+                <a:cs typeface="Calibri" pitchFamily="34" charset="-120"/>
+              </a:rPr>
+              <a:t> · the PRG32 tools</a:t>
+            </a:r>
+            <a:endParaRPr lang="en-US" sz="1100" dirty="0"/>
+          </a:p>
+        </p:txBody>
+      </p:sp>
+      <p:sp>
+        <p:nvSpPr>
           <p:cNvPr id="25" name="Slide Number Placeholder 0"/>
           <p:cNvSpPr>
             <a:spLocks noGrp="1"/>
@@ -6165,6 +7050,158 @@
       </p:sp>
       <p:sp>
         <p:nvSpPr>
+          <p:cNvPr id="17" name="Shape 15"/>
+          <p:cNvSpPr/>
+          <p:nvPr/>
+        </p:nvSpPr>
+        <p:spPr>
+          <a:xfrm>
+            <a:off x="9287967" y="91440"/>
+            <a:ext cx="2355088" cy="274320"/>
+          </a:xfrm>
+          <a:prstGeom prst="rect">
+            <a:avLst/>
+          </a:prstGeom>
+          <a:solidFill>
+            <a:srgbClr val="FEF3C7"/>
+          </a:solidFill>
+          <a:ln w="12700">
+            <a:solidFill>
+              <a:srgbClr val="B45309"/>
+            </a:solidFill>
+            <a:prstDash val="solid"/>
+          </a:ln>
+        </p:spPr>
+      </p:sp>
+      <p:sp>
+        <p:nvSpPr>
+          <p:cNvPr id="18" name="Shape 16"/>
+          <p:cNvSpPr/>
+          <p:nvPr/>
+        </p:nvSpPr>
+        <p:spPr>
+          <a:xfrm>
+            <a:off x="9287967" y="91440"/>
+            <a:ext cx="27432" cy="274320"/>
+          </a:xfrm>
+          <a:prstGeom prst="rect">
+            <a:avLst/>
+          </a:prstGeom>
+          <a:solidFill>
+            <a:srgbClr val="B45309"/>
+          </a:solidFill>
+          <a:ln w="12700">
+            <a:solidFill>
+              <a:srgbClr val="B45309"/>
+            </a:solidFill>
+            <a:prstDash val="solid"/>
+          </a:ln>
+        </p:spPr>
+      </p:sp>
+      <p:sp>
+        <p:nvSpPr>
+          <p:cNvPr id="19" name="Shape 17"/>
+          <p:cNvSpPr/>
+          <p:nvPr/>
+        </p:nvSpPr>
+        <p:spPr>
+          <a:xfrm>
+            <a:off x="9342831" y="91440"/>
+            <a:ext cx="27432" cy="274320"/>
+          </a:xfrm>
+          <a:prstGeom prst="rect">
+            <a:avLst/>
+          </a:prstGeom>
+          <a:solidFill>
+            <a:srgbClr val="B45309"/>
+          </a:solidFill>
+          <a:ln w="12700">
+            <a:solidFill>
+              <a:srgbClr val="B45309"/>
+            </a:solidFill>
+            <a:prstDash val="solid"/>
+          </a:ln>
+        </p:spPr>
+      </p:sp>
+      <p:pic>
+        <p:nvPicPr>
+          <p:cNvPr id="20" name="Image 0" descr="preencoded.png">    </p:cNvPr>
+          <p:cNvPicPr>
+            <a:picLocks noChangeAspect="1"/>
+          </p:cNvPicPr>
+          <p:nvPr/>
+        </p:nvPicPr>
+        <p:blipFill>
+          <a:blip r:embed="rId1"/>
+          <a:stretch>
+            <a:fillRect/>
+          </a:stretch>
+        </p:blipFill>
+        <p:spPr>
+          <a:xfrm>
+            <a:off x="9415983" y="128016"/>
+            <a:ext cx="201168" cy="201168"/>
+          </a:xfrm>
+          <a:prstGeom prst="rect">
+            <a:avLst/>
+          </a:prstGeom>
+        </p:spPr>
+      </p:pic>
+      <p:sp>
+        <p:nvSpPr>
+          <p:cNvPr id="21" name="Text 18"/>
+          <p:cNvSpPr txBox="1"/>
+          <p:nvPr/>
+        </p:nvSpPr>
+        <p:spPr>
+          <a:xfrm>
+            <a:off x="9672015" y="91440"/>
+            <a:ext cx="1934464" cy="274320"/>
+          </a:xfrm>
+          <a:prstGeom prst="rect">
+            <a:avLst/>
+          </a:prstGeom>
+          <a:noFill/>
+          <a:ln/>
+        </p:spPr>
+        <p:txBody>
+          <a:bodyPr wrap="square" lIns="0" tIns="0" rIns="0" bIns="0" rtlCol="0" anchor="ctr"/>
+          <a:lstStyle/>
+          <a:p>
+            <a:pPr indent="0" marL="0">
+              <a:buNone/>
+            </a:pPr>
+            <a:r>
+              <a:rPr lang="en-US" sz="1100" b="1" dirty="0">
+                <a:solidFill>
+                  <a:srgbClr val="92400E"/>
+                </a:solidFill>
+                <a:latin typeface="Calibri" pitchFamily="34" charset="0"/>
+                <a:ea typeface="Calibri" pitchFamily="34" charset="-122"/>
+                <a:cs typeface="Calibri" pitchFamily="34" charset="-120"/>
+              </a:rPr>
+              <a:t>USE NOW</a:t>
+            </a:r>
+            <a:pPr indent="0" marL="0">
+              <a:buNone/>
+            </a:pPr>
+            <a:r>
+              <a:rPr lang="en-US" sz="1100" dirty="0">
+                <a:solidFill>
+                  <a:srgbClr val="92400E"/>
+                </a:solidFill>
+                <a:latin typeface="Calibri" pitchFamily="34" charset="0"/>
+                <a:ea typeface="Calibri" pitchFamily="34" charset="-122"/>
+                <a:cs typeface="Calibri" pitchFamily="34" charset="-120"/>
+              </a:rPr>
+              <a:t> · the PRG32 tools</a:t>
+            </a:r>
+            <a:endParaRPr lang="en-US" sz="1100" dirty="0"/>
+          </a:p>
+        </p:txBody>
+      </p:sp>
+      <p:sp>
+        <p:nvSpPr>
           <p:cNvPr id="25" name="Slide Number Placeholder 0"/>
           <p:cNvSpPr>
             <a:spLocks noGrp="1"/>
@@ -6996,6 +8033,158 @@
               <a:t>A black screen: check the wiring of the display against the firmware</a:t>
             </a:r>
             <a:endParaRPr lang="en-US" sz="1200" dirty="0"/>
+          </a:p>
+        </p:txBody>
+      </p:sp>
+      <p:sp>
+        <p:nvSpPr>
+          <p:cNvPr id="17" name="Shape 15"/>
+          <p:cNvSpPr/>
+          <p:nvPr/>
+        </p:nvSpPr>
+        <p:spPr>
+          <a:xfrm>
+            <a:off x="9287967" y="91440"/>
+            <a:ext cx="2355088" cy="274320"/>
+          </a:xfrm>
+          <a:prstGeom prst="rect">
+            <a:avLst/>
+          </a:prstGeom>
+          <a:solidFill>
+            <a:srgbClr val="FEF3C7"/>
+          </a:solidFill>
+          <a:ln w="12700">
+            <a:solidFill>
+              <a:srgbClr val="B45309"/>
+            </a:solidFill>
+            <a:prstDash val="solid"/>
+          </a:ln>
+        </p:spPr>
+      </p:sp>
+      <p:sp>
+        <p:nvSpPr>
+          <p:cNvPr id="18" name="Shape 16"/>
+          <p:cNvSpPr/>
+          <p:nvPr/>
+        </p:nvSpPr>
+        <p:spPr>
+          <a:xfrm>
+            <a:off x="9287967" y="91440"/>
+            <a:ext cx="27432" cy="274320"/>
+          </a:xfrm>
+          <a:prstGeom prst="rect">
+            <a:avLst/>
+          </a:prstGeom>
+          <a:solidFill>
+            <a:srgbClr val="B45309"/>
+          </a:solidFill>
+          <a:ln w="12700">
+            <a:solidFill>
+              <a:srgbClr val="B45309"/>
+            </a:solidFill>
+            <a:prstDash val="solid"/>
+          </a:ln>
+        </p:spPr>
+      </p:sp>
+      <p:sp>
+        <p:nvSpPr>
+          <p:cNvPr id="19" name="Shape 17"/>
+          <p:cNvSpPr/>
+          <p:nvPr/>
+        </p:nvSpPr>
+        <p:spPr>
+          <a:xfrm>
+            <a:off x="9342831" y="91440"/>
+            <a:ext cx="27432" cy="274320"/>
+          </a:xfrm>
+          <a:prstGeom prst="rect">
+            <a:avLst/>
+          </a:prstGeom>
+          <a:solidFill>
+            <a:srgbClr val="B45309"/>
+          </a:solidFill>
+          <a:ln w="12700">
+            <a:solidFill>
+              <a:srgbClr val="B45309"/>
+            </a:solidFill>
+            <a:prstDash val="solid"/>
+          </a:ln>
+        </p:spPr>
+      </p:sp>
+      <p:pic>
+        <p:nvPicPr>
+          <p:cNvPr id="20" name="Image 0" descr="preencoded.png">    </p:cNvPr>
+          <p:cNvPicPr>
+            <a:picLocks noChangeAspect="1"/>
+          </p:cNvPicPr>
+          <p:nvPr/>
+        </p:nvPicPr>
+        <p:blipFill>
+          <a:blip r:embed="rId1"/>
+          <a:stretch>
+            <a:fillRect/>
+          </a:stretch>
+        </p:blipFill>
+        <p:spPr>
+          <a:xfrm>
+            <a:off x="9415983" y="128016"/>
+            <a:ext cx="201168" cy="201168"/>
+          </a:xfrm>
+          <a:prstGeom prst="rect">
+            <a:avLst/>
+          </a:prstGeom>
+        </p:spPr>
+      </p:pic>
+      <p:sp>
+        <p:nvSpPr>
+          <p:cNvPr id="21" name="Text 18"/>
+          <p:cNvSpPr txBox="1"/>
+          <p:nvPr/>
+        </p:nvSpPr>
+        <p:spPr>
+          <a:xfrm>
+            <a:off x="9672015" y="91440"/>
+            <a:ext cx="1934464" cy="274320"/>
+          </a:xfrm>
+          <a:prstGeom prst="rect">
+            <a:avLst/>
+          </a:prstGeom>
+          <a:noFill/>
+          <a:ln/>
+        </p:spPr>
+        <p:txBody>
+          <a:bodyPr wrap="square" lIns="0" tIns="0" rIns="0" bIns="0" rtlCol="0" anchor="ctr"/>
+          <a:lstStyle/>
+          <a:p>
+            <a:pPr indent="0" marL="0">
+              <a:buNone/>
+            </a:pPr>
+            <a:r>
+              <a:rPr lang="en-US" sz="1100" b="1" dirty="0">
+                <a:solidFill>
+                  <a:srgbClr val="92400E"/>
+                </a:solidFill>
+                <a:latin typeface="Calibri" pitchFamily="34" charset="0"/>
+                <a:ea typeface="Calibri" pitchFamily="34" charset="-122"/>
+                <a:cs typeface="Calibri" pitchFamily="34" charset="-120"/>
+              </a:rPr>
+              <a:t>USE NOW</a:t>
+            </a:r>
+            <a:pPr indent="0" marL="0">
+              <a:buNone/>
+            </a:pPr>
+            <a:r>
+              <a:rPr lang="en-US" sz="1100" dirty="0">
+                <a:solidFill>
+                  <a:srgbClr val="92400E"/>
+                </a:solidFill>
+                <a:latin typeface="Calibri" pitchFamily="34" charset="0"/>
+                <a:ea typeface="Calibri" pitchFamily="34" charset="-122"/>
+                <a:cs typeface="Calibri" pitchFamily="34" charset="-120"/>
+              </a:rPr>
+              <a:t> · the PRG32 tools</a:t>
+            </a:r>
+            <a:endParaRPr lang="en-US" sz="1100" dirty="0"/>
           </a:p>
         </p:txBody>
       </p:sp>
@@ -8382,6 +9571,158 @@
       </p:graphicFrame>
       <p:sp>
         <p:nvSpPr>
+          <p:cNvPr id="4" name="Shape 1"/>
+          <p:cNvSpPr/>
+          <p:nvPr/>
+        </p:nvSpPr>
+        <p:spPr>
+          <a:xfrm>
+            <a:off x="9287967" y="91440"/>
+            <a:ext cx="2355088" cy="274320"/>
+          </a:xfrm>
+          <a:prstGeom prst="rect">
+            <a:avLst/>
+          </a:prstGeom>
+          <a:solidFill>
+            <a:srgbClr val="FEF3C7"/>
+          </a:solidFill>
+          <a:ln w="12700">
+            <a:solidFill>
+              <a:srgbClr val="B45309"/>
+            </a:solidFill>
+            <a:prstDash val="solid"/>
+          </a:ln>
+        </p:spPr>
+      </p:sp>
+      <p:sp>
+        <p:nvSpPr>
+          <p:cNvPr id="5" name="Shape 2"/>
+          <p:cNvSpPr/>
+          <p:nvPr/>
+        </p:nvSpPr>
+        <p:spPr>
+          <a:xfrm>
+            <a:off x="9287967" y="91440"/>
+            <a:ext cx="27432" cy="274320"/>
+          </a:xfrm>
+          <a:prstGeom prst="rect">
+            <a:avLst/>
+          </a:prstGeom>
+          <a:solidFill>
+            <a:srgbClr val="B45309"/>
+          </a:solidFill>
+          <a:ln w="12700">
+            <a:solidFill>
+              <a:srgbClr val="B45309"/>
+            </a:solidFill>
+            <a:prstDash val="solid"/>
+          </a:ln>
+        </p:spPr>
+      </p:sp>
+      <p:sp>
+        <p:nvSpPr>
+          <p:cNvPr id="6" name="Shape 3"/>
+          <p:cNvSpPr/>
+          <p:nvPr/>
+        </p:nvSpPr>
+        <p:spPr>
+          <a:xfrm>
+            <a:off x="9342831" y="91440"/>
+            <a:ext cx="27432" cy="274320"/>
+          </a:xfrm>
+          <a:prstGeom prst="rect">
+            <a:avLst/>
+          </a:prstGeom>
+          <a:solidFill>
+            <a:srgbClr val="B45309"/>
+          </a:solidFill>
+          <a:ln w="12700">
+            <a:solidFill>
+              <a:srgbClr val="B45309"/>
+            </a:solidFill>
+            <a:prstDash val="solid"/>
+          </a:ln>
+        </p:spPr>
+      </p:sp>
+      <p:pic>
+        <p:nvPicPr>
+          <p:cNvPr id="7" name="Image 0" descr="preencoded.png">    </p:cNvPr>
+          <p:cNvPicPr>
+            <a:picLocks noChangeAspect="1"/>
+          </p:cNvPicPr>
+          <p:nvPr/>
+        </p:nvPicPr>
+        <p:blipFill>
+          <a:blip r:embed="rId1"/>
+          <a:stretch>
+            <a:fillRect/>
+          </a:stretch>
+        </p:blipFill>
+        <p:spPr>
+          <a:xfrm>
+            <a:off x="9415983" y="128016"/>
+            <a:ext cx="201168" cy="201168"/>
+          </a:xfrm>
+          <a:prstGeom prst="rect">
+            <a:avLst/>
+          </a:prstGeom>
+        </p:spPr>
+      </p:pic>
+      <p:sp>
+        <p:nvSpPr>
+          <p:cNvPr id="8" name="Text 4"/>
+          <p:cNvSpPr txBox="1"/>
+          <p:nvPr/>
+        </p:nvSpPr>
+        <p:spPr>
+          <a:xfrm>
+            <a:off x="9672015" y="91440"/>
+            <a:ext cx="1934464" cy="274320"/>
+          </a:xfrm>
+          <a:prstGeom prst="rect">
+            <a:avLst/>
+          </a:prstGeom>
+          <a:noFill/>
+          <a:ln/>
+        </p:spPr>
+        <p:txBody>
+          <a:bodyPr wrap="square" lIns="0" tIns="0" rIns="0" bIns="0" rtlCol="0" anchor="ctr"/>
+          <a:lstStyle/>
+          <a:p>
+            <a:pPr indent="0" marL="0">
+              <a:buNone/>
+            </a:pPr>
+            <a:r>
+              <a:rPr lang="en-US" sz="1100" b="1" dirty="0">
+                <a:solidFill>
+                  <a:srgbClr val="92400E"/>
+                </a:solidFill>
+                <a:latin typeface="Calibri" pitchFamily="34" charset="0"/>
+                <a:ea typeface="Calibri" pitchFamily="34" charset="-122"/>
+                <a:cs typeface="Calibri" pitchFamily="34" charset="-120"/>
+              </a:rPr>
+              <a:t>USE NOW</a:t>
+            </a:r>
+            <a:pPr indent="0" marL="0">
+              <a:buNone/>
+            </a:pPr>
+            <a:r>
+              <a:rPr lang="en-US" sz="1100" dirty="0">
+                <a:solidFill>
+                  <a:srgbClr val="92400E"/>
+                </a:solidFill>
+                <a:latin typeface="Calibri" pitchFamily="34" charset="0"/>
+                <a:ea typeface="Calibri" pitchFamily="34" charset="-122"/>
+                <a:cs typeface="Calibri" pitchFamily="34" charset="-120"/>
+              </a:rPr>
+              <a:t> · the PRG32 tools</a:t>
+            </a:r>
+            <a:endParaRPr lang="en-US" sz="1100" dirty="0"/>
+          </a:p>
+        </p:txBody>
+      </p:sp>
+      <p:sp>
+        <p:nvSpPr>
           <p:cNvPr id="25" name="Slide Number Placeholder 0"/>
           <p:cNvSpPr>
             <a:spLocks noGrp="1"/>
@@ -10459,6 +11800,133 @@
       </p:sp>
       <p:sp>
         <p:nvSpPr>
+          <p:cNvPr id="17" name="Shape 15"/>
+          <p:cNvSpPr/>
+          <p:nvPr/>
+        </p:nvSpPr>
+        <p:spPr>
+          <a:xfrm>
+            <a:off x="8222056" y="91440"/>
+            <a:ext cx="3420999" cy="274320"/>
+          </a:xfrm>
+          <a:prstGeom prst="rect">
+            <a:avLst/>
+          </a:prstGeom>
+          <a:solidFill>
+            <a:srgbClr val="E0F2FE"/>
+          </a:solidFill>
+          <a:ln w="12700">
+            <a:solidFill>
+              <a:srgbClr val="0369A1"/>
+            </a:solidFill>
+            <a:prstDash val="solid"/>
+          </a:ln>
+        </p:spPr>
+      </p:sp>
+      <p:sp>
+        <p:nvSpPr>
+          <p:cNvPr id="18" name="Shape 16"/>
+          <p:cNvSpPr/>
+          <p:nvPr/>
+        </p:nvSpPr>
+        <p:spPr>
+          <a:xfrm>
+            <a:off x="8222056" y="91440"/>
+            <a:ext cx="73152" cy="274320"/>
+          </a:xfrm>
+          <a:prstGeom prst="rect">
+            <a:avLst/>
+          </a:prstGeom>
+          <a:solidFill>
+            <a:srgbClr val="0369A1"/>
+          </a:solidFill>
+          <a:ln w="12700">
+            <a:solidFill>
+              <a:srgbClr val="0369A1"/>
+            </a:solidFill>
+            <a:prstDash val="solid"/>
+          </a:ln>
+        </p:spPr>
+      </p:sp>
+      <p:pic>
+        <p:nvPicPr>
+          <p:cNvPr id="19" name="Image 0" descr="preencoded.png">    </p:cNvPr>
+          <p:cNvPicPr>
+            <a:picLocks noChangeAspect="1"/>
+          </p:cNvPicPr>
+          <p:nvPr/>
+        </p:nvPicPr>
+        <p:blipFill>
+          <a:blip r:embed="rId1"/>
+          <a:stretch>
+            <a:fillRect/>
+          </a:stretch>
+        </p:blipFill>
+        <p:spPr>
+          <a:xfrm>
+            <a:off x="8350072" y="128016"/>
+            <a:ext cx="201168" cy="201168"/>
+          </a:xfrm>
+          <a:prstGeom prst="rect">
+            <a:avLst/>
+          </a:prstGeom>
+        </p:spPr>
+      </p:pic>
+      <p:sp>
+        <p:nvSpPr>
+          <p:cNvPr id="20" name="Text 17"/>
+          <p:cNvSpPr txBox="1"/>
+          <p:nvPr/>
+        </p:nvSpPr>
+        <p:spPr>
+          <a:xfrm>
+            <a:off x="8606104" y="91440"/>
+            <a:ext cx="3000375" cy="274320"/>
+          </a:xfrm>
+          <a:prstGeom prst="rect">
+            <a:avLst/>
+          </a:prstGeom>
+          <a:noFill/>
+          <a:ln/>
+        </p:spPr>
+        <p:txBody>
+          <a:bodyPr wrap="square" lIns="0" tIns="0" rIns="0" bIns="0" rtlCol="0" anchor="ctr"/>
+          <a:lstStyle/>
+          <a:p>
+            <a:pPr indent="0" marL="0">
+              <a:buNone/>
+            </a:pPr>
+            <a:r>
+              <a:rPr lang="en-US" sz="1100" b="1" dirty="0">
+                <a:solidFill>
+                  <a:srgbClr val="075985"/>
+                </a:solidFill>
+                <a:latin typeface="Calibri" pitchFamily="34" charset="0"/>
+                <a:ea typeface="Calibri" pitchFamily="34" charset="-122"/>
+                <a:cs typeface="Calibri" pitchFamily="34" charset="-120"/>
+              </a:rPr>
+              <a:t>UNDERSTAND NOW</a:t>
+            </a:r>
+            <a:pPr indent="0" marL="0">
+              <a:buNone/>
+            </a:pPr>
+            <a:r>
+              <a:rPr lang="en-US" sz="1100" dirty="0">
+                <a:solidFill>
+                  <a:srgbClr val="075985"/>
+                </a:solidFill>
+                <a:latin typeface="Calibri" pitchFamily="34" charset="0"/>
+                <a:ea typeface="Calibri" pitchFamily="34" charset="-122"/>
+                <a:cs typeface="Calibri" pitchFamily="34" charset="-120"/>
+              </a:rPr>
+              <a:t> · memories and addresses</a:t>
+            </a:r>
+            <a:endParaRPr lang="en-US" sz="1100" dirty="0"/>
+          </a:p>
+        </p:txBody>
+      </p:sp>
+      <p:sp>
+        <p:nvSpPr>
           <p:cNvPr id="25" name="Slide Number Placeholder 0"/>
           <p:cNvSpPr>
             <a:spLocks noGrp="1"/>
@@ -11082,6 +12550,133 @@
               <a:t># aligned</a:t>
             </a:r>
             <a:endParaRPr lang="en-US" sz="1600" dirty="0"/>
+          </a:p>
+        </p:txBody>
+      </p:sp>
+      <p:sp>
+        <p:nvSpPr>
+          <p:cNvPr id="15" name="Shape 13"/>
+          <p:cNvSpPr/>
+          <p:nvPr/>
+        </p:nvSpPr>
+        <p:spPr>
+          <a:xfrm>
+            <a:off x="8222056" y="91440"/>
+            <a:ext cx="3420999" cy="274320"/>
+          </a:xfrm>
+          <a:prstGeom prst="rect">
+            <a:avLst/>
+          </a:prstGeom>
+          <a:solidFill>
+            <a:srgbClr val="E0F2FE"/>
+          </a:solidFill>
+          <a:ln w="12700">
+            <a:solidFill>
+              <a:srgbClr val="0369A1"/>
+            </a:solidFill>
+            <a:prstDash val="solid"/>
+          </a:ln>
+        </p:spPr>
+      </p:sp>
+      <p:sp>
+        <p:nvSpPr>
+          <p:cNvPr id="16" name="Shape 14"/>
+          <p:cNvSpPr/>
+          <p:nvPr/>
+        </p:nvSpPr>
+        <p:spPr>
+          <a:xfrm>
+            <a:off x="8222056" y="91440"/>
+            <a:ext cx="73152" cy="274320"/>
+          </a:xfrm>
+          <a:prstGeom prst="rect">
+            <a:avLst/>
+          </a:prstGeom>
+          <a:solidFill>
+            <a:srgbClr val="0369A1"/>
+          </a:solidFill>
+          <a:ln w="12700">
+            <a:solidFill>
+              <a:srgbClr val="0369A1"/>
+            </a:solidFill>
+            <a:prstDash val="solid"/>
+          </a:ln>
+        </p:spPr>
+      </p:sp>
+      <p:pic>
+        <p:nvPicPr>
+          <p:cNvPr id="17" name="Image 0" descr="preencoded.png">    </p:cNvPr>
+          <p:cNvPicPr>
+            <a:picLocks noChangeAspect="1"/>
+          </p:cNvPicPr>
+          <p:nvPr/>
+        </p:nvPicPr>
+        <p:blipFill>
+          <a:blip r:embed="rId1"/>
+          <a:stretch>
+            <a:fillRect/>
+          </a:stretch>
+        </p:blipFill>
+        <p:spPr>
+          <a:xfrm>
+            <a:off x="8350072" y="128016"/>
+            <a:ext cx="201168" cy="201168"/>
+          </a:xfrm>
+          <a:prstGeom prst="rect">
+            <a:avLst/>
+          </a:prstGeom>
+        </p:spPr>
+      </p:pic>
+      <p:sp>
+        <p:nvSpPr>
+          <p:cNvPr id="18" name="Text 15"/>
+          <p:cNvSpPr txBox="1"/>
+          <p:nvPr/>
+        </p:nvSpPr>
+        <p:spPr>
+          <a:xfrm>
+            <a:off x="8606104" y="91440"/>
+            <a:ext cx="3000375" cy="274320"/>
+          </a:xfrm>
+          <a:prstGeom prst="rect">
+            <a:avLst/>
+          </a:prstGeom>
+          <a:noFill/>
+          <a:ln/>
+        </p:spPr>
+        <p:txBody>
+          <a:bodyPr wrap="square" lIns="0" tIns="0" rIns="0" bIns="0" rtlCol="0" anchor="ctr"/>
+          <a:lstStyle/>
+          <a:p>
+            <a:pPr indent="0" marL="0">
+              <a:buNone/>
+            </a:pPr>
+            <a:r>
+              <a:rPr lang="en-US" sz="1100" b="1" dirty="0">
+                <a:solidFill>
+                  <a:srgbClr val="075985"/>
+                </a:solidFill>
+                <a:latin typeface="Calibri" pitchFamily="34" charset="0"/>
+                <a:ea typeface="Calibri" pitchFamily="34" charset="-122"/>
+                <a:cs typeface="Calibri" pitchFamily="34" charset="-120"/>
+              </a:rPr>
+              <a:t>UNDERSTAND NOW</a:t>
+            </a:r>
+            <a:pPr indent="0" marL="0">
+              <a:buNone/>
+            </a:pPr>
+            <a:r>
+              <a:rPr lang="en-US" sz="1100" dirty="0">
+                <a:solidFill>
+                  <a:srgbClr val="075985"/>
+                </a:solidFill>
+                <a:latin typeface="Calibri" pitchFamily="34" charset="0"/>
+                <a:ea typeface="Calibri" pitchFamily="34" charset="-122"/>
+                <a:cs typeface="Calibri" pitchFamily="34" charset="-120"/>
+              </a:rPr>
+              <a:t> · memories and addresses</a:t>
+            </a:r>
+            <a:endParaRPr lang="en-US" sz="1100" dirty="0"/>
           </a:p>
         </p:txBody>
       </p:sp>
@@ -12713,6 +14308,133 @@
       </p:sp>
       <p:sp>
         <p:nvSpPr>
+          <p:cNvPr id="5" name="Shape 2"/>
+          <p:cNvSpPr/>
+          <p:nvPr/>
+        </p:nvSpPr>
+        <p:spPr>
+          <a:xfrm>
+            <a:off x="8353374" y="91440"/>
+            <a:ext cx="3289681" cy="274320"/>
+          </a:xfrm>
+          <a:prstGeom prst="rect">
+            <a:avLst/>
+          </a:prstGeom>
+          <a:solidFill>
+            <a:srgbClr val="E0F2FE"/>
+          </a:solidFill>
+          <a:ln w="12700">
+            <a:solidFill>
+              <a:srgbClr val="0369A1"/>
+            </a:solidFill>
+            <a:prstDash val="solid"/>
+          </a:ln>
+        </p:spPr>
+      </p:sp>
+      <p:sp>
+        <p:nvSpPr>
+          <p:cNvPr id="6" name="Shape 3"/>
+          <p:cNvSpPr/>
+          <p:nvPr/>
+        </p:nvSpPr>
+        <p:spPr>
+          <a:xfrm>
+            <a:off x="8353374" y="91440"/>
+            <a:ext cx="73152" cy="274320"/>
+          </a:xfrm>
+          <a:prstGeom prst="rect">
+            <a:avLst/>
+          </a:prstGeom>
+          <a:solidFill>
+            <a:srgbClr val="0369A1"/>
+          </a:solidFill>
+          <a:ln w="12700">
+            <a:solidFill>
+              <a:srgbClr val="0369A1"/>
+            </a:solidFill>
+            <a:prstDash val="solid"/>
+          </a:ln>
+        </p:spPr>
+      </p:sp>
+      <p:pic>
+        <p:nvPicPr>
+          <p:cNvPr id="7" name="Image 0" descr="preencoded.png">    </p:cNvPr>
+          <p:cNvPicPr>
+            <a:picLocks noChangeAspect="1"/>
+          </p:cNvPicPr>
+          <p:nvPr/>
+        </p:nvPicPr>
+        <p:blipFill>
+          <a:blip r:embed="rId1"/>
+          <a:stretch>
+            <a:fillRect/>
+          </a:stretch>
+        </p:blipFill>
+        <p:spPr>
+          <a:xfrm>
+            <a:off x="8481390" y="128016"/>
+            <a:ext cx="201168" cy="201168"/>
+          </a:xfrm>
+          <a:prstGeom prst="rect">
+            <a:avLst/>
+          </a:prstGeom>
+        </p:spPr>
+      </p:pic>
+      <p:sp>
+        <p:nvSpPr>
+          <p:cNvPr id="8" name="Text 4"/>
+          <p:cNvSpPr txBox="1"/>
+          <p:nvPr/>
+        </p:nvSpPr>
+        <p:spPr>
+          <a:xfrm>
+            <a:off x="8737422" y="91440"/>
+            <a:ext cx="2869057" cy="274320"/>
+          </a:xfrm>
+          <a:prstGeom prst="rect">
+            <a:avLst/>
+          </a:prstGeom>
+          <a:noFill/>
+          <a:ln/>
+        </p:spPr>
+        <p:txBody>
+          <a:bodyPr wrap="square" lIns="0" tIns="0" rIns="0" bIns="0" rtlCol="0" anchor="ctr"/>
+          <a:lstStyle/>
+          <a:p>
+            <a:pPr indent="0" marL="0">
+              <a:buNone/>
+            </a:pPr>
+            <a:r>
+              <a:rPr lang="en-US" sz="1100" b="1" dirty="0">
+                <a:solidFill>
+                  <a:srgbClr val="075985"/>
+                </a:solidFill>
+                <a:latin typeface="Calibri" pitchFamily="34" charset="0"/>
+                <a:ea typeface="Calibri" pitchFamily="34" charset="-122"/>
+                <a:cs typeface="Calibri" pitchFamily="34" charset="-120"/>
+              </a:rPr>
+              <a:t>UNDERSTAND NOW</a:t>
+            </a:r>
+            <a:pPr indent="0" marL="0">
+              <a:buNone/>
+            </a:pPr>
+            <a:r>
+              <a:rPr lang="en-US" sz="1100" dirty="0">
+                <a:solidFill>
+                  <a:srgbClr val="075985"/>
+                </a:solidFill>
+                <a:latin typeface="Calibri" pitchFamily="34" charset="0"/>
+                <a:ea typeface="Calibri" pitchFamily="34" charset="-122"/>
+                <a:cs typeface="Calibri" pitchFamily="34" charset="-120"/>
+              </a:rPr>
+              <a:t> · processor and memory</a:t>
+            </a:r>
+            <a:endParaRPr lang="en-US" sz="1100" dirty="0"/>
+          </a:p>
+        </p:txBody>
+      </p:sp>
+      <p:sp>
+        <p:nvSpPr>
           <p:cNvPr id="25" name="Slide Number Placeholder 0"/>
           <p:cNvSpPr>
             <a:spLocks noGrp="1"/>
@@ -13927,6 +15649,133 @@
       </p:sp>
       <p:sp>
         <p:nvSpPr>
+          <p:cNvPr id="5" name="Shape 2"/>
+          <p:cNvSpPr/>
+          <p:nvPr/>
+        </p:nvSpPr>
+        <p:spPr>
+          <a:xfrm>
+            <a:off x="8550351" y="91440"/>
+            <a:ext cx="3092704" cy="274320"/>
+          </a:xfrm>
+          <a:prstGeom prst="rect">
+            <a:avLst/>
+          </a:prstGeom>
+          <a:solidFill>
+            <a:srgbClr val="E0F2FE"/>
+          </a:solidFill>
+          <a:ln w="12700">
+            <a:solidFill>
+              <a:srgbClr val="0369A1"/>
+            </a:solidFill>
+            <a:prstDash val="solid"/>
+          </a:ln>
+        </p:spPr>
+      </p:sp>
+      <p:sp>
+        <p:nvSpPr>
+          <p:cNvPr id="6" name="Shape 3"/>
+          <p:cNvSpPr/>
+          <p:nvPr/>
+        </p:nvSpPr>
+        <p:spPr>
+          <a:xfrm>
+            <a:off x="8550351" y="91440"/>
+            <a:ext cx="73152" cy="274320"/>
+          </a:xfrm>
+          <a:prstGeom prst="rect">
+            <a:avLst/>
+          </a:prstGeom>
+          <a:solidFill>
+            <a:srgbClr val="0369A1"/>
+          </a:solidFill>
+          <a:ln w="12700">
+            <a:solidFill>
+              <a:srgbClr val="0369A1"/>
+            </a:solidFill>
+            <a:prstDash val="solid"/>
+          </a:ln>
+        </p:spPr>
+      </p:sp>
+      <p:pic>
+        <p:nvPicPr>
+          <p:cNvPr id="7" name="Image 0" descr="preencoded.png">    </p:cNvPr>
+          <p:cNvPicPr>
+            <a:picLocks noChangeAspect="1"/>
+          </p:cNvPicPr>
+          <p:nvPr/>
+        </p:nvPicPr>
+        <p:blipFill>
+          <a:blip r:embed="rId1"/>
+          <a:stretch>
+            <a:fillRect/>
+          </a:stretch>
+        </p:blipFill>
+        <p:spPr>
+          <a:xfrm>
+            <a:off x="8678367" y="128016"/>
+            <a:ext cx="201168" cy="201168"/>
+          </a:xfrm>
+          <a:prstGeom prst="rect">
+            <a:avLst/>
+          </a:prstGeom>
+        </p:spPr>
+      </p:pic>
+      <p:sp>
+        <p:nvSpPr>
+          <p:cNvPr id="8" name="Text 4"/>
+          <p:cNvSpPr txBox="1"/>
+          <p:nvPr/>
+        </p:nvSpPr>
+        <p:spPr>
+          <a:xfrm>
+            <a:off x="8934399" y="91440"/>
+            <a:ext cx="2672080" cy="274320"/>
+          </a:xfrm>
+          <a:prstGeom prst="rect">
+            <a:avLst/>
+          </a:prstGeom>
+          <a:noFill/>
+          <a:ln/>
+        </p:spPr>
+        <p:txBody>
+          <a:bodyPr wrap="square" lIns="0" tIns="0" rIns="0" bIns="0" rtlCol="0" anchor="ctr"/>
+          <a:lstStyle/>
+          <a:p>
+            <a:pPr indent="0" marL="0">
+              <a:buNone/>
+            </a:pPr>
+            <a:r>
+              <a:rPr lang="en-US" sz="1100" b="1" dirty="0">
+                <a:solidFill>
+                  <a:srgbClr val="075985"/>
+                </a:solidFill>
+                <a:latin typeface="Calibri" pitchFamily="34" charset="0"/>
+                <a:ea typeface="Calibri" pitchFamily="34" charset="-122"/>
+                <a:cs typeface="Calibri" pitchFamily="34" charset="-120"/>
+              </a:rPr>
+              <a:t>UNDERSTAND NOW</a:t>
+            </a:r>
+            <a:pPr indent="0" marL="0">
+              <a:buNone/>
+            </a:pPr>
+            <a:r>
+              <a:rPr lang="en-US" sz="1100" dirty="0">
+                <a:solidFill>
+                  <a:srgbClr val="075985"/>
+                </a:solidFill>
+                <a:latin typeface="Calibri" pitchFamily="34" charset="0"/>
+                <a:ea typeface="Calibri" pitchFamily="34" charset="-122"/>
+                <a:cs typeface="Calibri" pitchFamily="34" charset="-120"/>
+              </a:rPr>
+              <a:t> · memory-mapped I/O</a:t>
+            </a:r>
+            <a:endParaRPr lang="en-US" sz="1100" dirty="0"/>
+          </a:p>
+        </p:txBody>
+      </p:sp>
+      <p:sp>
+        <p:nvSpPr>
           <p:cNvPr id="25" name="Slide Number Placeholder 0"/>
           <p:cNvSpPr>
             <a:spLocks noGrp="1"/>
@@ -14464,6 +16313,158 @@
       </p:sp>
       <p:sp>
         <p:nvSpPr>
+          <p:cNvPr id="5" name="Shape 3"/>
+          <p:cNvSpPr/>
+          <p:nvPr/>
+        </p:nvSpPr>
+        <p:spPr>
+          <a:xfrm>
+            <a:off x="8959672" y="91440"/>
+            <a:ext cx="2683383" cy="274320"/>
+          </a:xfrm>
+          <a:prstGeom prst="rect">
+            <a:avLst/>
+          </a:prstGeom>
+          <a:solidFill>
+            <a:srgbClr val="FEF3C7"/>
+          </a:solidFill>
+          <a:ln w="12700">
+            <a:solidFill>
+              <a:srgbClr val="B45309"/>
+            </a:solidFill>
+            <a:prstDash val="solid"/>
+          </a:ln>
+        </p:spPr>
+      </p:sp>
+      <p:sp>
+        <p:nvSpPr>
+          <p:cNvPr id="6" name="Shape 4"/>
+          <p:cNvSpPr/>
+          <p:nvPr/>
+        </p:nvSpPr>
+        <p:spPr>
+          <a:xfrm>
+            <a:off x="8959672" y="91440"/>
+            <a:ext cx="27432" cy="274320"/>
+          </a:xfrm>
+          <a:prstGeom prst="rect">
+            <a:avLst/>
+          </a:prstGeom>
+          <a:solidFill>
+            <a:srgbClr val="B45309"/>
+          </a:solidFill>
+          <a:ln w="12700">
+            <a:solidFill>
+              <a:srgbClr val="B45309"/>
+            </a:solidFill>
+            <a:prstDash val="solid"/>
+          </a:ln>
+        </p:spPr>
+      </p:sp>
+      <p:sp>
+        <p:nvSpPr>
+          <p:cNvPr id="7" name="Shape 5"/>
+          <p:cNvSpPr/>
+          <p:nvPr/>
+        </p:nvSpPr>
+        <p:spPr>
+          <a:xfrm>
+            <a:off x="9014536" y="91440"/>
+            <a:ext cx="27432" cy="274320"/>
+          </a:xfrm>
+          <a:prstGeom prst="rect">
+            <a:avLst/>
+          </a:prstGeom>
+          <a:solidFill>
+            <a:srgbClr val="B45309"/>
+          </a:solidFill>
+          <a:ln w="12700">
+            <a:solidFill>
+              <a:srgbClr val="B45309"/>
+            </a:solidFill>
+            <a:prstDash val="solid"/>
+          </a:ln>
+        </p:spPr>
+      </p:sp>
+      <p:pic>
+        <p:nvPicPr>
+          <p:cNvPr id="8" name="Image 0" descr="preencoded.png">    </p:cNvPr>
+          <p:cNvPicPr>
+            <a:picLocks noChangeAspect="1"/>
+          </p:cNvPicPr>
+          <p:nvPr/>
+        </p:nvPicPr>
+        <p:blipFill>
+          <a:blip r:embed="rId1"/>
+          <a:stretch>
+            <a:fillRect/>
+          </a:stretch>
+        </p:blipFill>
+        <p:spPr>
+          <a:xfrm>
+            <a:off x="9087688" y="128016"/>
+            <a:ext cx="201168" cy="201168"/>
+          </a:xfrm>
+          <a:prstGeom prst="rect">
+            <a:avLst/>
+          </a:prstGeom>
+        </p:spPr>
+      </p:pic>
+      <p:sp>
+        <p:nvSpPr>
+          <p:cNvPr id="9" name="Text 6"/>
+          <p:cNvSpPr txBox="1"/>
+          <p:nvPr/>
+        </p:nvSpPr>
+        <p:spPr>
+          <a:xfrm>
+            <a:off x="9343720" y="91440"/>
+            <a:ext cx="2262759" cy="274320"/>
+          </a:xfrm>
+          <a:prstGeom prst="rect">
+            <a:avLst/>
+          </a:prstGeom>
+          <a:noFill/>
+          <a:ln/>
+        </p:spPr>
+        <p:txBody>
+          <a:bodyPr wrap="square" lIns="0" tIns="0" rIns="0" bIns="0" rtlCol="0" anchor="ctr"/>
+          <a:lstStyle/>
+          <a:p>
+            <a:pPr indent="0" marL="0">
+              <a:buNone/>
+            </a:pPr>
+            <a:r>
+              <a:rPr lang="en-US" sz="1100" b="1" dirty="0">
+                <a:solidFill>
+                  <a:srgbClr val="92400E"/>
+                </a:solidFill>
+                <a:latin typeface="Calibri" pitchFamily="34" charset="0"/>
+                <a:ea typeface="Calibri" pitchFamily="34" charset="-122"/>
+                <a:cs typeface="Calibri" pitchFamily="34" charset="-120"/>
+              </a:rPr>
+              <a:t>USE NOW</a:t>
+            </a:r>
+            <a:pPr indent="0" marL="0">
+              <a:buNone/>
+            </a:pPr>
+            <a:r>
+              <a:rPr lang="en-US" sz="1100" dirty="0">
+                <a:solidFill>
+                  <a:srgbClr val="92400E"/>
+                </a:solidFill>
+                <a:latin typeface="Calibri" pitchFamily="34" charset="0"/>
+                <a:ea typeface="Calibri" pitchFamily="34" charset="-122"/>
+                <a:cs typeface="Calibri" pitchFamily="34" charset="-120"/>
+              </a:rPr>
+              <a:t> · the complete program</a:t>
+            </a:r>
+            <a:endParaRPr lang="en-US" sz="1100" dirty="0"/>
+          </a:p>
+        </p:txBody>
+      </p:sp>
+      <p:sp>
+        <p:nvSpPr>
           <p:cNvPr id="25" name="Slide Number Placeholder 0"/>
           <p:cNvSpPr>
             <a:spLocks noGrp="1"/>
@@ -14862,6 +16863,158 @@
       </p:sp>
       <p:sp>
         <p:nvSpPr>
+          <p:cNvPr id="5" name="Shape 3"/>
+          <p:cNvSpPr/>
+          <p:nvPr/>
+        </p:nvSpPr>
+        <p:spPr>
+          <a:xfrm>
+            <a:off x="8959672" y="91440"/>
+            <a:ext cx="2683383" cy="274320"/>
+          </a:xfrm>
+          <a:prstGeom prst="rect">
+            <a:avLst/>
+          </a:prstGeom>
+          <a:solidFill>
+            <a:srgbClr val="FEF3C7"/>
+          </a:solidFill>
+          <a:ln w="12700">
+            <a:solidFill>
+              <a:srgbClr val="B45309"/>
+            </a:solidFill>
+            <a:prstDash val="solid"/>
+          </a:ln>
+        </p:spPr>
+      </p:sp>
+      <p:sp>
+        <p:nvSpPr>
+          <p:cNvPr id="6" name="Shape 4"/>
+          <p:cNvSpPr/>
+          <p:nvPr/>
+        </p:nvSpPr>
+        <p:spPr>
+          <a:xfrm>
+            <a:off x="8959672" y="91440"/>
+            <a:ext cx="27432" cy="274320"/>
+          </a:xfrm>
+          <a:prstGeom prst="rect">
+            <a:avLst/>
+          </a:prstGeom>
+          <a:solidFill>
+            <a:srgbClr val="B45309"/>
+          </a:solidFill>
+          <a:ln w="12700">
+            <a:solidFill>
+              <a:srgbClr val="B45309"/>
+            </a:solidFill>
+            <a:prstDash val="solid"/>
+          </a:ln>
+        </p:spPr>
+      </p:sp>
+      <p:sp>
+        <p:nvSpPr>
+          <p:cNvPr id="7" name="Shape 5"/>
+          <p:cNvSpPr/>
+          <p:nvPr/>
+        </p:nvSpPr>
+        <p:spPr>
+          <a:xfrm>
+            <a:off x="9014536" y="91440"/>
+            <a:ext cx="27432" cy="274320"/>
+          </a:xfrm>
+          <a:prstGeom prst="rect">
+            <a:avLst/>
+          </a:prstGeom>
+          <a:solidFill>
+            <a:srgbClr val="B45309"/>
+          </a:solidFill>
+          <a:ln w="12700">
+            <a:solidFill>
+              <a:srgbClr val="B45309"/>
+            </a:solidFill>
+            <a:prstDash val="solid"/>
+          </a:ln>
+        </p:spPr>
+      </p:sp>
+      <p:pic>
+        <p:nvPicPr>
+          <p:cNvPr id="8" name="Image 0" descr="preencoded.png">    </p:cNvPr>
+          <p:cNvPicPr>
+            <a:picLocks noChangeAspect="1"/>
+          </p:cNvPicPr>
+          <p:nvPr/>
+        </p:nvPicPr>
+        <p:blipFill>
+          <a:blip r:embed="rId1"/>
+          <a:stretch>
+            <a:fillRect/>
+          </a:stretch>
+        </p:blipFill>
+        <p:spPr>
+          <a:xfrm>
+            <a:off x="9087688" y="128016"/>
+            <a:ext cx="201168" cy="201168"/>
+          </a:xfrm>
+          <a:prstGeom prst="rect">
+            <a:avLst/>
+          </a:prstGeom>
+        </p:spPr>
+      </p:pic>
+      <p:sp>
+        <p:nvSpPr>
+          <p:cNvPr id="9" name="Text 6"/>
+          <p:cNvSpPr txBox="1"/>
+          <p:nvPr/>
+        </p:nvSpPr>
+        <p:spPr>
+          <a:xfrm>
+            <a:off x="9343720" y="91440"/>
+            <a:ext cx="2262759" cy="274320"/>
+          </a:xfrm>
+          <a:prstGeom prst="rect">
+            <a:avLst/>
+          </a:prstGeom>
+          <a:noFill/>
+          <a:ln/>
+        </p:spPr>
+        <p:txBody>
+          <a:bodyPr wrap="square" lIns="0" tIns="0" rIns="0" bIns="0" rtlCol="0" anchor="ctr"/>
+          <a:lstStyle/>
+          <a:p>
+            <a:pPr indent="0" marL="0">
+              <a:buNone/>
+            </a:pPr>
+            <a:r>
+              <a:rPr lang="en-US" sz="1100" b="1" dirty="0">
+                <a:solidFill>
+                  <a:srgbClr val="92400E"/>
+                </a:solidFill>
+                <a:latin typeface="Calibri" pitchFamily="34" charset="0"/>
+                <a:ea typeface="Calibri" pitchFamily="34" charset="-122"/>
+                <a:cs typeface="Calibri" pitchFamily="34" charset="-120"/>
+              </a:rPr>
+              <a:t>USE NOW</a:t>
+            </a:r>
+            <a:pPr indent="0" marL="0">
+              <a:buNone/>
+            </a:pPr>
+            <a:r>
+              <a:rPr lang="en-US" sz="1100" dirty="0">
+                <a:solidFill>
+                  <a:srgbClr val="92400E"/>
+                </a:solidFill>
+                <a:latin typeface="Calibri" pitchFamily="34" charset="0"/>
+                <a:ea typeface="Calibri" pitchFamily="34" charset="-122"/>
+                <a:cs typeface="Calibri" pitchFamily="34" charset="-120"/>
+              </a:rPr>
+              <a:t> · the complete program</a:t>
+            </a:r>
+            <a:endParaRPr lang="en-US" sz="1100" dirty="0"/>
+          </a:p>
+        </p:txBody>
+      </p:sp>
+      <p:sp>
+        <p:nvSpPr>
           <p:cNvPr id="25" name="Slide Number Placeholder 0"/>
           <p:cNvSpPr>
             <a:spLocks noGrp="1"/>
@@ -15444,6 +17597,158 @@
               <a:t>    ret</a:t>
             </a:r>
             <a:endParaRPr lang="en-US" sz="1400" dirty="0"/>
+          </a:p>
+        </p:txBody>
+      </p:sp>
+      <p:sp>
+        <p:nvSpPr>
+          <p:cNvPr id="5" name="Shape 3"/>
+          <p:cNvSpPr/>
+          <p:nvPr/>
+        </p:nvSpPr>
+        <p:spPr>
+          <a:xfrm>
+            <a:off x="8959672" y="91440"/>
+            <a:ext cx="2683383" cy="274320"/>
+          </a:xfrm>
+          <a:prstGeom prst="rect">
+            <a:avLst/>
+          </a:prstGeom>
+          <a:solidFill>
+            <a:srgbClr val="FEF3C7"/>
+          </a:solidFill>
+          <a:ln w="12700">
+            <a:solidFill>
+              <a:srgbClr val="B45309"/>
+            </a:solidFill>
+            <a:prstDash val="solid"/>
+          </a:ln>
+        </p:spPr>
+      </p:sp>
+      <p:sp>
+        <p:nvSpPr>
+          <p:cNvPr id="6" name="Shape 4"/>
+          <p:cNvSpPr/>
+          <p:nvPr/>
+        </p:nvSpPr>
+        <p:spPr>
+          <a:xfrm>
+            <a:off x="8959672" y="91440"/>
+            <a:ext cx="27432" cy="274320"/>
+          </a:xfrm>
+          <a:prstGeom prst="rect">
+            <a:avLst/>
+          </a:prstGeom>
+          <a:solidFill>
+            <a:srgbClr val="B45309"/>
+          </a:solidFill>
+          <a:ln w="12700">
+            <a:solidFill>
+              <a:srgbClr val="B45309"/>
+            </a:solidFill>
+            <a:prstDash val="solid"/>
+          </a:ln>
+        </p:spPr>
+      </p:sp>
+      <p:sp>
+        <p:nvSpPr>
+          <p:cNvPr id="7" name="Shape 5"/>
+          <p:cNvSpPr/>
+          <p:nvPr/>
+        </p:nvSpPr>
+        <p:spPr>
+          <a:xfrm>
+            <a:off x="9014536" y="91440"/>
+            <a:ext cx="27432" cy="274320"/>
+          </a:xfrm>
+          <a:prstGeom prst="rect">
+            <a:avLst/>
+          </a:prstGeom>
+          <a:solidFill>
+            <a:srgbClr val="B45309"/>
+          </a:solidFill>
+          <a:ln w="12700">
+            <a:solidFill>
+              <a:srgbClr val="B45309"/>
+            </a:solidFill>
+            <a:prstDash val="solid"/>
+          </a:ln>
+        </p:spPr>
+      </p:sp>
+      <p:pic>
+        <p:nvPicPr>
+          <p:cNvPr id="8" name="Image 0" descr="preencoded.png">    </p:cNvPr>
+          <p:cNvPicPr>
+            <a:picLocks noChangeAspect="1"/>
+          </p:cNvPicPr>
+          <p:nvPr/>
+        </p:nvPicPr>
+        <p:blipFill>
+          <a:blip r:embed="rId1"/>
+          <a:stretch>
+            <a:fillRect/>
+          </a:stretch>
+        </p:blipFill>
+        <p:spPr>
+          <a:xfrm>
+            <a:off x="9087688" y="128016"/>
+            <a:ext cx="201168" cy="201168"/>
+          </a:xfrm>
+          <a:prstGeom prst="rect">
+            <a:avLst/>
+          </a:prstGeom>
+        </p:spPr>
+      </p:pic>
+      <p:sp>
+        <p:nvSpPr>
+          <p:cNvPr id="9" name="Text 6"/>
+          <p:cNvSpPr txBox="1"/>
+          <p:nvPr/>
+        </p:nvSpPr>
+        <p:spPr>
+          <a:xfrm>
+            <a:off x="9343720" y="91440"/>
+            <a:ext cx="2262759" cy="274320"/>
+          </a:xfrm>
+          <a:prstGeom prst="rect">
+            <a:avLst/>
+          </a:prstGeom>
+          <a:noFill/>
+          <a:ln/>
+        </p:spPr>
+        <p:txBody>
+          <a:bodyPr wrap="square" lIns="0" tIns="0" rIns="0" bIns="0" rtlCol="0" anchor="ctr"/>
+          <a:lstStyle/>
+          <a:p>
+            <a:pPr indent="0" marL="0">
+              <a:buNone/>
+            </a:pPr>
+            <a:r>
+              <a:rPr lang="en-US" sz="1100" b="1" dirty="0">
+                <a:solidFill>
+                  <a:srgbClr val="92400E"/>
+                </a:solidFill>
+                <a:latin typeface="Calibri" pitchFamily="34" charset="0"/>
+                <a:ea typeface="Calibri" pitchFamily="34" charset="-122"/>
+                <a:cs typeface="Calibri" pitchFamily="34" charset="-120"/>
+              </a:rPr>
+              <a:t>USE NOW</a:t>
+            </a:r>
+            <a:pPr indent="0" marL="0">
+              <a:buNone/>
+            </a:pPr>
+            <a:r>
+              <a:rPr lang="en-US" sz="1100" dirty="0">
+                <a:solidFill>
+                  <a:srgbClr val="92400E"/>
+                </a:solidFill>
+                <a:latin typeface="Calibri" pitchFamily="34" charset="0"/>
+                <a:ea typeface="Calibri" pitchFamily="34" charset="-122"/>
+                <a:cs typeface="Calibri" pitchFamily="34" charset="-120"/>
+              </a:rPr>
+              <a:t> · the complete program</a:t>
+            </a:r>
+            <a:endParaRPr lang="en-US" sz="1100" dirty="0"/>
           </a:p>
         </p:txBody>
       </p:sp>

--- a/en/slides/15-Computer_Architecture-Memory-Code.pptx
+++ b/en/slides/15-Computer_Architecture-Memory-Code.pptx
@@ -123,33 +123,33 @@
   <p:extLst>
     <p:ext uri="{521415D9-36F7-43E2-AB2F-B90AF26B5E84}">
       <p14:sectionLst xmlns:p14="http://schemas.microsoft.com/office/powerpoint/2010/main">
-        <p14:section name="Opening" id="{295f9987-9b54-646c-a076-888da31400cc}">
+        <p14:section name="Opening" id="{c94c3faf-28ec-0983-3474-3d1bd7b310ab}">
           <p14:sldIdLst>
             <p14:sldId id="256"/>
             <p14:sldId id="257"/>
           </p14:sldIdLst>
         </p14:section>
-        <p14:section name="Warm-up on the machine" id="{57adb3c4-f557-ee27-8dc8-af3c472f331d}">
+        <p14:section name="Warm-up on the machine" id="{5b52848f-7006-d2d7-f791-7d5b50c9252e}">
           <p14:sldIdLst>
             <p14:sldId id="258"/>
           </p14:sldIdLst>
         </p14:section>
-        <p14:section name="The main memory" id="{b8c913ce-4169-383a-612f-923669d08c12}">
+        <p14:section name="The main memory" id="{76cc7689-d27c-4bec-da51-be84f92f478a}">
           <p14:sldIdLst>
             <p14:sldId id="259"/>
           </p14:sldIdLst>
         </p14:section>
-        <p14:section name="Processor and memory" id="{47c26b1c-de73-67d9-fd67-34585d7d166e}">
+        <p14:section name="Processor and memory" id="{2b4207b4-b1f5-c102-7562-1eca1f4cc735}">
           <p14:sldIdLst>
             <p14:sldId id="260"/>
           </p14:sldIdLst>
         </p14:section>
-        <p14:section name="Memory and input/output" id="{3393cdbe-5c82-b0d6-f03b-3614f666a185}">
+        <p14:section name="Memory and input/output" id="{067c63c4-ab06-7b81-4f24-7b86ed5ac43f}">
           <p14:sldIdLst>
             <p14:sldId id="261"/>
           </p14:sldIdLst>
         </p14:section>
-        <p14:section name="The complete program" id="{89221fb3-342d-94a5-23f0-968ff2bff6a8}">
+        <p14:section name="The complete program" id="{501e1369-93ee-4c55-1ce0-8c55aa1f68ff}">
           <p14:sldIdLst>
             <p14:sldId id="262"/>
             <p14:sldId id="263"/>
@@ -158,7 +158,7 @@
             <p14:sldId id="266"/>
           </p14:sldIdLst>
         </p14:section>
-        <p14:section name="Run it and test it" id="{0821aa2a-331a-9578-6565-a290e3a342eb}">
+        <p14:section name="Run it and test it" id="{f388707f-7b93-6d0f-354a-227b84cfd109}">
           <p14:sldIdLst>
             <p14:sldId id="267"/>
             <p14:sldId id="268"/>
@@ -167,7 +167,7 @@
             <p14:sldId id="271"/>
           </p14:sldIdLst>
         </p14:section>
-        <p14:section name="Exercises" id="{22310a69-8e5c-7596-acc3-b8a5e5644ec0}">
+        <p14:section name="Exercises" id="{0eee6540-431b-bae7-d659-e7270f1b6622}">
           <p14:sldIdLst>
             <p14:sldId id="272"/>
           </p14:sldIdLst>
